--- a/Kovta Nyrt_English.pptx
+++ b/Kovta Nyrt_English.pptx
@@ -14,11 +14,12 @@
     <p:sldId id="266" r:id="rId8"/>
     <p:sldId id="267" r:id="rId9"/>
     <p:sldId id="269" r:id="rId10"/>
-    <p:sldId id="268" r:id="rId11"/>
-    <p:sldId id="263" r:id="rId12"/>
-    <p:sldId id="264" r:id="rId13"/>
-    <p:sldId id="265" r:id="rId14"/>
-    <p:sldId id="259" r:id="rId15"/>
+    <p:sldId id="273" r:id="rId11"/>
+    <p:sldId id="268" r:id="rId12"/>
+    <p:sldId id="263" r:id="rId13"/>
+    <p:sldId id="264" r:id="rId14"/>
+    <p:sldId id="265" r:id="rId15"/>
+    <p:sldId id="259" r:id="rId16"/>
   </p:sldIdLst>
   <p:sldSz cx="12192000" cy="6858000"/>
   <p:notesSz cx="6858000" cy="9144000"/>
@@ -1006,7 +1007,7 @@
           <a:p>
             <a:fld id="{64E71317-EACD-4ACE-B971-84E39F8DD59C}" type="datetimeFigureOut">
               <a:rPr lang="hu-HU" smtClean="0"/>
-              <a:t>2026. 02. 02.</a:t>
+              <a:t>2026. 02. 17.</a:t>
             </a:fld>
             <a:endParaRPr lang="hu-HU"/>
           </a:p>
@@ -1064,6 +1065,18 @@
   <p:clrMapOvr>
     <a:masterClrMapping/>
   </p:clrMapOvr>
+  <mc:AlternateContent xmlns:mc="http://schemas.openxmlformats.org/markup-compatibility/2006" xmlns:p159="http://schemas.microsoft.com/office/powerpoint/2015/09/main">
+    <mc:Choice Requires="p159">
+      <p:transition xmlns:p14="http://schemas.microsoft.com/office/powerpoint/2010/main" spd="slow" p14:dur="2000">
+        <p159:morph option="byObject"/>
+      </p:transition>
+    </mc:Choice>
+    <mc:Fallback xmlns="">
+      <p:transition spd="slow">
+        <p:fade/>
+      </p:transition>
+    </mc:Fallback>
+  </mc:AlternateContent>
 </p:sldLayout>
 </file>
 
@@ -1281,7 +1294,7 @@
           <a:p>
             <a:fld id="{64E71317-EACD-4ACE-B971-84E39F8DD59C}" type="datetimeFigureOut">
               <a:rPr lang="hu-HU" smtClean="0"/>
-              <a:t>2026. 02. 02.</a:t>
+              <a:t>2026. 02. 17.</a:t>
             </a:fld>
             <a:endParaRPr lang="hu-HU"/>
           </a:p>
@@ -1339,6 +1352,18 @@
   <p:clrMapOvr>
     <a:masterClrMapping/>
   </p:clrMapOvr>
+  <mc:AlternateContent xmlns:mc="http://schemas.openxmlformats.org/markup-compatibility/2006" xmlns:p159="http://schemas.microsoft.com/office/powerpoint/2015/09/main">
+    <mc:Choice Requires="p159">
+      <p:transition xmlns:p14="http://schemas.microsoft.com/office/powerpoint/2010/main" spd="slow" p14:dur="2000">
+        <p159:morph option="byObject"/>
+      </p:transition>
+    </mc:Choice>
+    <mc:Fallback xmlns="">
+      <p:transition spd="slow">
+        <p:fade/>
+      </p:transition>
+    </mc:Fallback>
+  </mc:AlternateContent>
 </p:sldLayout>
 </file>
 
@@ -1475,7 +1500,7 @@
           <a:p>
             <a:fld id="{64E71317-EACD-4ACE-B971-84E39F8DD59C}" type="datetimeFigureOut">
               <a:rPr lang="hu-HU" smtClean="0"/>
-              <a:t>2026. 02. 02.</a:t>
+              <a:t>2026. 02. 17.</a:t>
             </a:fld>
             <a:endParaRPr lang="hu-HU"/>
           </a:p>
@@ -1533,6 +1558,18 @@
   <p:clrMapOvr>
     <a:masterClrMapping/>
   </p:clrMapOvr>
+  <mc:AlternateContent xmlns:mc="http://schemas.openxmlformats.org/markup-compatibility/2006" xmlns:p159="http://schemas.microsoft.com/office/powerpoint/2015/09/main">
+    <mc:Choice Requires="p159">
+      <p:transition xmlns:p14="http://schemas.microsoft.com/office/powerpoint/2010/main" spd="slow" p14:dur="2000">
+        <p159:morph option="byObject"/>
+      </p:transition>
+    </mc:Choice>
+    <mc:Fallback xmlns="">
+      <p:transition spd="slow">
+        <p:fade/>
+      </p:transition>
+    </mc:Fallback>
+  </mc:AlternateContent>
 </p:sldLayout>
 </file>
 
@@ -1748,7 +1785,7 @@
           <a:p>
             <a:fld id="{64E71317-EACD-4ACE-B971-84E39F8DD59C}" type="datetimeFigureOut">
               <a:rPr lang="hu-HU" smtClean="0"/>
-              <a:t>2026. 02. 02.</a:t>
+              <a:t>2026. 02. 17.</a:t>
             </a:fld>
             <a:endParaRPr lang="hu-HU"/>
           </a:p>
@@ -1900,6 +1937,18 @@
   <p:clrMapOvr>
     <a:masterClrMapping/>
   </p:clrMapOvr>
+  <mc:AlternateContent xmlns:mc="http://schemas.openxmlformats.org/markup-compatibility/2006" xmlns:p159="http://schemas.microsoft.com/office/powerpoint/2015/09/main">
+    <mc:Choice Requires="p159">
+      <p:transition xmlns:p14="http://schemas.microsoft.com/office/powerpoint/2010/main" spd="slow" p14:dur="2000">
+        <p159:morph option="byObject"/>
+      </p:transition>
+    </mc:Choice>
+    <mc:Fallback xmlns="">
+      <p:transition spd="slow">
+        <p:fade/>
+      </p:transition>
+    </mc:Fallback>
+  </mc:AlternateContent>
 </p:sldLayout>
 </file>
 
@@ -2089,7 +2138,7 @@
           <a:p>
             <a:fld id="{64E71317-EACD-4ACE-B971-84E39F8DD59C}" type="datetimeFigureOut">
               <a:rPr lang="hu-HU" smtClean="0"/>
-              <a:t>2026. 02. 02.</a:t>
+              <a:t>2026. 02. 17.</a:t>
             </a:fld>
             <a:endParaRPr lang="hu-HU"/>
           </a:p>
@@ -2147,6 +2196,18 @@
   <p:clrMapOvr>
     <a:masterClrMapping/>
   </p:clrMapOvr>
+  <mc:AlternateContent xmlns:mc="http://schemas.openxmlformats.org/markup-compatibility/2006" xmlns:p159="http://schemas.microsoft.com/office/powerpoint/2015/09/main">
+    <mc:Choice Requires="p159">
+      <p:transition xmlns:p14="http://schemas.microsoft.com/office/powerpoint/2010/main" spd="slow" p14:dur="2000">
+        <p159:morph option="byObject"/>
+      </p:transition>
+    </mc:Choice>
+    <mc:Fallback xmlns="">
+      <p:transition spd="slow">
+        <p:fade/>
+      </p:transition>
+    </mc:Fallback>
+  </mc:AlternateContent>
 </p:sldLayout>
 </file>
 
@@ -2712,7 +2773,7 @@
           <a:p>
             <a:fld id="{64E71317-EACD-4ACE-B971-84E39F8DD59C}" type="datetimeFigureOut">
               <a:rPr lang="hu-HU" smtClean="0"/>
-              <a:t>2026. 02. 02.</a:t>
+              <a:t>2026. 02. 17.</a:t>
             </a:fld>
             <a:endParaRPr lang="hu-HU"/>
           </a:p>
@@ -2770,6 +2831,18 @@
   <p:clrMapOvr>
     <a:masterClrMapping/>
   </p:clrMapOvr>
+  <mc:AlternateContent xmlns:mc="http://schemas.openxmlformats.org/markup-compatibility/2006" xmlns:p159="http://schemas.microsoft.com/office/powerpoint/2015/09/main">
+    <mc:Choice Requires="p159">
+      <p:transition xmlns:p14="http://schemas.microsoft.com/office/powerpoint/2010/main" spd="slow" p14:dur="2000">
+        <p159:morph option="byObject"/>
+      </p:transition>
+    </mc:Choice>
+    <mc:Fallback xmlns="">
+      <p:transition spd="slow">
+        <p:fade/>
+      </p:transition>
+    </mc:Fallback>
+  </mc:AlternateContent>
 </p:sldLayout>
 </file>
 
@@ -3572,7 +3645,7 @@
           <a:p>
             <a:fld id="{64E71317-EACD-4ACE-B971-84E39F8DD59C}" type="datetimeFigureOut">
               <a:rPr lang="hu-HU" smtClean="0"/>
-              <a:t>2026. 02. 02.</a:t>
+              <a:t>2026. 02. 17.</a:t>
             </a:fld>
             <a:endParaRPr lang="hu-HU"/>
           </a:p>
@@ -3630,6 +3703,18 @@
   <p:clrMapOvr>
     <a:masterClrMapping/>
   </p:clrMapOvr>
+  <mc:AlternateContent xmlns:mc="http://schemas.openxmlformats.org/markup-compatibility/2006" xmlns:p159="http://schemas.microsoft.com/office/powerpoint/2015/09/main">
+    <mc:Choice Requires="p159">
+      <p:transition xmlns:p14="http://schemas.microsoft.com/office/powerpoint/2010/main" spd="slow" p14:dur="2000">
+        <p159:morph option="byObject"/>
+      </p:transition>
+    </mc:Choice>
+    <mc:Fallback xmlns="">
+      <p:transition spd="slow">
+        <p:fade/>
+      </p:transition>
+    </mc:Fallback>
+  </mc:AlternateContent>
 </p:sldLayout>
 </file>
 
@@ -3742,7 +3827,7 @@
           <a:p>
             <a:fld id="{64E71317-EACD-4ACE-B971-84E39F8DD59C}" type="datetimeFigureOut">
               <a:rPr lang="hu-HU" smtClean="0"/>
-              <a:t>2026. 02. 02.</a:t>
+              <a:t>2026. 02. 17.</a:t>
             </a:fld>
             <a:endParaRPr lang="hu-HU"/>
           </a:p>
@@ -3800,6 +3885,18 @@
   <p:clrMapOvr>
     <a:masterClrMapping/>
   </p:clrMapOvr>
+  <mc:AlternateContent xmlns:mc="http://schemas.openxmlformats.org/markup-compatibility/2006" xmlns:p159="http://schemas.microsoft.com/office/powerpoint/2015/09/main">
+    <mc:Choice Requires="p159">
+      <p:transition xmlns:p14="http://schemas.microsoft.com/office/powerpoint/2010/main" spd="slow" p14:dur="2000">
+        <p159:morph option="byObject"/>
+      </p:transition>
+    </mc:Choice>
+    <mc:Fallback xmlns="">
+      <p:transition spd="slow">
+        <p:fade/>
+      </p:transition>
+    </mc:Fallback>
+  </mc:AlternateContent>
 </p:sldLayout>
 </file>
 
@@ -3922,7 +4019,7 @@
           <a:p>
             <a:fld id="{64E71317-EACD-4ACE-B971-84E39F8DD59C}" type="datetimeFigureOut">
               <a:rPr lang="hu-HU" smtClean="0"/>
-              <a:t>2026. 02. 02.</a:t>
+              <a:t>2026. 02. 17.</a:t>
             </a:fld>
             <a:endParaRPr lang="hu-HU"/>
           </a:p>
@@ -3980,6 +4077,18 @@
   <p:clrMapOvr>
     <a:masterClrMapping/>
   </p:clrMapOvr>
+  <mc:AlternateContent xmlns:mc="http://schemas.openxmlformats.org/markup-compatibility/2006" xmlns:p159="http://schemas.microsoft.com/office/powerpoint/2015/09/main">
+    <mc:Choice Requires="p159">
+      <p:transition xmlns:p14="http://schemas.microsoft.com/office/powerpoint/2010/main" spd="slow" p14:dur="2000">
+        <p159:morph option="byObject"/>
+      </p:transition>
+    </mc:Choice>
+    <mc:Fallback xmlns="">
+      <p:transition spd="slow">
+        <p:fade/>
+      </p:transition>
+    </mc:Fallback>
+  </mc:AlternateContent>
 </p:sldLayout>
 </file>
 
@@ -4092,7 +4201,7 @@
           <a:p>
             <a:fld id="{64E71317-EACD-4ACE-B971-84E39F8DD59C}" type="datetimeFigureOut">
               <a:rPr lang="hu-HU" smtClean="0"/>
-              <a:t>2026. 02. 02.</a:t>
+              <a:t>2026. 02. 17.</a:t>
             </a:fld>
             <a:endParaRPr lang="hu-HU"/>
           </a:p>
@@ -4150,6 +4259,18 @@
   <p:clrMapOvr>
     <a:masterClrMapping/>
   </p:clrMapOvr>
+  <mc:AlternateContent xmlns:mc="http://schemas.openxmlformats.org/markup-compatibility/2006" xmlns:p159="http://schemas.microsoft.com/office/powerpoint/2015/09/main">
+    <mc:Choice Requires="p159">
+      <p:transition xmlns:p14="http://schemas.microsoft.com/office/powerpoint/2010/main" spd="slow" p14:dur="2000">
+        <p159:morph option="byObject"/>
+      </p:transition>
+    </mc:Choice>
+    <mc:Fallback xmlns="">
+      <p:transition spd="slow">
+        <p:fade/>
+      </p:transition>
+    </mc:Fallback>
+  </mc:AlternateContent>
 </p:sldLayout>
 </file>
 
@@ -4339,7 +4460,7 @@
           <a:p>
             <a:fld id="{64E71317-EACD-4ACE-B971-84E39F8DD59C}" type="datetimeFigureOut">
               <a:rPr lang="hu-HU" smtClean="0"/>
-              <a:t>2026. 02. 02.</a:t>
+              <a:t>2026. 02. 17.</a:t>
             </a:fld>
             <a:endParaRPr lang="hu-HU"/>
           </a:p>
@@ -4397,6 +4518,18 @@
   <p:clrMapOvr>
     <a:masterClrMapping/>
   </p:clrMapOvr>
+  <mc:AlternateContent xmlns:mc="http://schemas.openxmlformats.org/markup-compatibility/2006" xmlns:p159="http://schemas.microsoft.com/office/powerpoint/2015/09/main">
+    <mc:Choice Requires="p159">
+      <p:transition xmlns:p14="http://schemas.microsoft.com/office/powerpoint/2010/main" spd="slow" p14:dur="2000">
+        <p159:morph option="byObject"/>
+      </p:transition>
+    </mc:Choice>
+    <mc:Fallback xmlns="">
+      <p:transition spd="slow">
+        <p:fade/>
+      </p:transition>
+    </mc:Fallback>
+  </mc:AlternateContent>
 </p:sldLayout>
 </file>
 
@@ -4631,7 +4764,7 @@
           <a:p>
             <a:fld id="{64E71317-EACD-4ACE-B971-84E39F8DD59C}" type="datetimeFigureOut">
               <a:rPr lang="hu-HU" smtClean="0"/>
-              <a:t>2026. 02. 02.</a:t>
+              <a:t>2026. 02. 17.</a:t>
             </a:fld>
             <a:endParaRPr lang="hu-HU"/>
           </a:p>
@@ -4689,6 +4822,18 @@
   <p:clrMapOvr>
     <a:masterClrMapping/>
   </p:clrMapOvr>
+  <mc:AlternateContent xmlns:mc="http://schemas.openxmlformats.org/markup-compatibility/2006" xmlns:p159="http://schemas.microsoft.com/office/powerpoint/2015/09/main">
+    <mc:Choice Requires="p159">
+      <p:transition xmlns:p14="http://schemas.microsoft.com/office/powerpoint/2010/main" spd="slow" p14:dur="2000">
+        <p159:morph option="byObject"/>
+      </p:transition>
+    </mc:Choice>
+    <mc:Fallback xmlns="">
+      <p:transition spd="slow">
+        <p:fade/>
+      </p:transition>
+    </mc:Fallback>
+  </mc:AlternateContent>
 </p:sldLayout>
 </file>
 
@@ -5075,7 +5220,7 @@
           <a:p>
             <a:fld id="{64E71317-EACD-4ACE-B971-84E39F8DD59C}" type="datetimeFigureOut">
               <a:rPr lang="hu-HU" smtClean="0"/>
-              <a:t>2026. 02. 02.</a:t>
+              <a:t>2026. 02. 17.</a:t>
             </a:fld>
             <a:endParaRPr lang="hu-HU"/>
           </a:p>
@@ -5133,6 +5278,18 @@
   <p:clrMapOvr>
     <a:masterClrMapping/>
   </p:clrMapOvr>
+  <mc:AlternateContent xmlns:mc="http://schemas.openxmlformats.org/markup-compatibility/2006" xmlns:p159="http://schemas.microsoft.com/office/powerpoint/2015/09/main">
+    <mc:Choice Requires="p159">
+      <p:transition xmlns:p14="http://schemas.microsoft.com/office/powerpoint/2010/main" spd="slow" p14:dur="2000">
+        <p159:morph option="byObject"/>
+      </p:transition>
+    </mc:Choice>
+    <mc:Fallback xmlns="">
+      <p:transition spd="slow">
+        <p:fade/>
+      </p:transition>
+    </mc:Fallback>
+  </mc:AlternateContent>
 </p:sldLayout>
 </file>
 
@@ -5193,7 +5350,7 @@
           <a:p>
             <a:fld id="{64E71317-EACD-4ACE-B971-84E39F8DD59C}" type="datetimeFigureOut">
               <a:rPr lang="hu-HU" smtClean="0"/>
-              <a:t>2026. 02. 02.</a:t>
+              <a:t>2026. 02. 17.</a:t>
             </a:fld>
             <a:endParaRPr lang="hu-HU"/>
           </a:p>
@@ -5251,6 +5408,18 @@
   <p:clrMapOvr>
     <a:masterClrMapping/>
   </p:clrMapOvr>
+  <mc:AlternateContent xmlns:mc="http://schemas.openxmlformats.org/markup-compatibility/2006" xmlns:p159="http://schemas.microsoft.com/office/powerpoint/2015/09/main">
+    <mc:Choice Requires="p159">
+      <p:transition xmlns:p14="http://schemas.microsoft.com/office/powerpoint/2010/main" spd="slow" p14:dur="2000">
+        <p159:morph option="byObject"/>
+      </p:transition>
+    </mc:Choice>
+    <mc:Fallback xmlns="">
+      <p:transition spd="slow">
+        <p:fade/>
+      </p:transition>
+    </mc:Fallback>
+  </mc:AlternateContent>
 </p:sldLayout>
 </file>
 
@@ -5288,7 +5457,7 @@
           <a:p>
             <a:fld id="{64E71317-EACD-4ACE-B971-84E39F8DD59C}" type="datetimeFigureOut">
               <a:rPr lang="hu-HU" smtClean="0"/>
-              <a:t>2026. 02. 02.</a:t>
+              <a:t>2026. 02. 17.</a:t>
             </a:fld>
             <a:endParaRPr lang="hu-HU"/>
           </a:p>
@@ -5346,6 +5515,18 @@
   <p:clrMapOvr>
     <a:masterClrMapping/>
   </p:clrMapOvr>
+  <mc:AlternateContent xmlns:mc="http://schemas.openxmlformats.org/markup-compatibility/2006" xmlns:p159="http://schemas.microsoft.com/office/powerpoint/2015/09/main">
+    <mc:Choice Requires="p159">
+      <p:transition xmlns:p14="http://schemas.microsoft.com/office/powerpoint/2010/main" spd="slow" p14:dur="2000">
+        <p159:morph option="byObject"/>
+      </p:transition>
+    </mc:Choice>
+    <mc:Fallback xmlns="">
+      <p:transition spd="slow">
+        <p:fade/>
+      </p:transition>
+    </mc:Fallback>
+  </mc:AlternateContent>
 </p:sldLayout>
 </file>
 
@@ -5567,7 +5748,7 @@
           <a:p>
             <a:fld id="{64E71317-EACD-4ACE-B971-84E39F8DD59C}" type="datetimeFigureOut">
               <a:rPr lang="hu-HU" smtClean="0"/>
-              <a:t>2026. 02. 02.</a:t>
+              <a:t>2026. 02. 17.</a:t>
             </a:fld>
             <a:endParaRPr lang="hu-HU"/>
           </a:p>
@@ -5625,6 +5806,18 @@
   <p:clrMapOvr>
     <a:masterClrMapping/>
   </p:clrMapOvr>
+  <mc:AlternateContent xmlns:mc="http://schemas.openxmlformats.org/markup-compatibility/2006" xmlns:p159="http://schemas.microsoft.com/office/powerpoint/2015/09/main">
+    <mc:Choice Requires="p159">
+      <p:transition xmlns:p14="http://schemas.microsoft.com/office/powerpoint/2010/main" spd="slow" p14:dur="2000">
+        <p159:morph option="byObject"/>
+      </p:transition>
+    </mc:Choice>
+    <mc:Fallback xmlns="">
+      <p:transition spd="slow">
+        <p:fade/>
+      </p:transition>
+    </mc:Fallback>
+  </mc:AlternateContent>
 </p:sldLayout>
 </file>
 
@@ -5842,7 +6035,7 @@
           <a:p>
             <a:fld id="{64E71317-EACD-4ACE-B971-84E39F8DD59C}" type="datetimeFigureOut">
               <a:rPr lang="hu-HU" smtClean="0"/>
-              <a:t>2026. 02. 02.</a:t>
+              <a:t>2026. 02. 17.</a:t>
             </a:fld>
             <a:endParaRPr lang="hu-HU"/>
           </a:p>
@@ -5900,6 +6093,18 @@
   <p:clrMapOvr>
     <a:masterClrMapping/>
   </p:clrMapOvr>
+  <mc:AlternateContent xmlns:mc="http://schemas.openxmlformats.org/markup-compatibility/2006" xmlns:p159="http://schemas.microsoft.com/office/powerpoint/2015/09/main">
+    <mc:Choice Requires="p159">
+      <p:transition xmlns:p14="http://schemas.microsoft.com/office/powerpoint/2010/main" spd="slow" p14:dur="2000">
+        <p159:morph option="byObject"/>
+      </p:transition>
+    </mc:Choice>
+    <mc:Fallback xmlns="">
+      <p:transition spd="slow">
+        <p:fade/>
+      </p:transition>
+    </mc:Fallback>
+  </mc:AlternateContent>
 </p:sldLayout>
 </file>
 
@@ -6285,7 +6490,7 @@
           <a:p>
             <a:fld id="{64E71317-EACD-4ACE-B971-84E39F8DD59C}" type="datetimeFigureOut">
               <a:rPr lang="hu-HU" smtClean="0"/>
-              <a:t>2026. 02. 02.</a:t>
+              <a:t>2026. 02. 17.</a:t>
             </a:fld>
             <a:endParaRPr lang="hu-HU"/>
           </a:p>
@@ -6397,6 +6602,18 @@
     <p:sldLayoutId id="2147483676" r:id="rId16"/>
     <p:sldLayoutId id="2147483677" r:id="rId17"/>
   </p:sldLayoutIdLst>
+  <mc:AlternateContent xmlns:mc="http://schemas.openxmlformats.org/markup-compatibility/2006" xmlns:p159="http://schemas.microsoft.com/office/powerpoint/2015/09/main">
+    <mc:Choice Requires="p159">
+      <p:transition xmlns:p14="http://schemas.microsoft.com/office/powerpoint/2010/main" spd="slow" p14:dur="2000">
+        <p159:morph option="byObject"/>
+      </p:transition>
+    </mc:Choice>
+    <mc:Fallback xmlns="">
+      <p:transition spd="slow">
+        <p:fade/>
+      </p:transition>
+    </mc:Fallback>
+  </mc:AlternateContent>
   <p:txStyles>
     <p:titleStyle>
       <a:lvl1pPr algn="l" defTabSz="457200" rtl="0" eaLnBrk="1" latinLnBrk="0" hangingPunct="1">
@@ -6927,10 +7144,1495 @@
   <p:clrMapOvr>
     <a:masterClrMapping/>
   </p:clrMapOvr>
+  <mc:AlternateContent xmlns:mc="http://schemas.openxmlformats.org/markup-compatibility/2006" xmlns:p159="http://schemas.microsoft.com/office/powerpoint/2015/09/main">
+    <mc:Choice Requires="p159">
+      <p:transition xmlns:p14="http://schemas.microsoft.com/office/powerpoint/2010/main" spd="slow" p14:dur="2000">
+        <p159:morph option="byObject"/>
+      </p:transition>
+    </mc:Choice>
+    <mc:Fallback xmlns="">
+      <p:transition spd="slow">
+        <p:fade/>
+      </p:transition>
+    </mc:Fallback>
+  </mc:AlternateContent>
 </p:sld>
 </file>
 
 <file path=ppt/slides/slide10.xml><?xml version="1.0" encoding="utf-8"?>
+<p:sld xmlns:a="http://schemas.openxmlformats.org/drawingml/2006/main" xmlns:r="http://schemas.openxmlformats.org/officeDocument/2006/relationships" xmlns:p="http://schemas.openxmlformats.org/presentationml/2006/main">
+  <p:cSld>
+    <p:bg>
+      <p:bgPr>
+        <a:solidFill>
+          <a:schemeClr val="bg2"/>
+        </a:solidFill>
+        <a:effectLst/>
+      </p:bgPr>
+    </p:bg>
+    <p:spTree>
+      <p:nvGrpSpPr>
+        <p:cNvPr id="1" name=""/>
+        <p:cNvGrpSpPr/>
+        <p:nvPr/>
+      </p:nvGrpSpPr>
+      <p:grpSpPr>
+        <a:xfrm>
+          <a:off x="0" y="0"/>
+          <a:ext cx="0" cy="0"/>
+          <a:chOff x="0" y="0"/>
+          <a:chExt cx="0" cy="0"/>
+        </a:xfrm>
+      </p:grpSpPr>
+      <p:sp useBgFill="1">
+        <p:nvSpPr>
+          <p:cNvPr id="8" name="Rectangle 7">
+            <a:extLst>
+              <a:ext uri="{FF2B5EF4-FFF2-40B4-BE49-F238E27FC236}">
+                <a16:creationId xmlns:a16="http://schemas.microsoft.com/office/drawing/2014/main" id="{052BEFF1-896C-45B1-B02C-96A6A1BC389A}"/>
+              </a:ext>
+              <a:ext uri="{C183D7F6-B498-43B3-948B-1728B52AA6E4}">
+                <adec:decorative xmlns:adec="http://schemas.microsoft.com/office/drawing/2017/decorative" val="1"/>
+              </a:ext>
+            </a:extLst>
+          </p:cNvPr>
+          <p:cNvSpPr>
+            <a:spLocks noGrp="1" noRot="1" noChangeAspect="1" noMove="1" noResize="1" noEditPoints="1" noAdjustHandles="1" noChangeArrowheads="1" noChangeShapeType="1" noTextEdit="1"/>
+          </p:cNvSpPr>
+          <p:nvPr>
+            <p:extLst>
+              <p:ext uri="{386F3935-93C4-4BCD-93E2-E3B085C9AB24}">
+                <p16:designElem xmlns:p16="http://schemas.microsoft.com/office/powerpoint/2015/main" val="1"/>
+              </p:ext>
+            </p:extLst>
+          </p:nvPr>
+        </p:nvSpPr>
+        <p:spPr>
+          <a:xfrm>
+            <a:off x="1" y="0"/>
+            <a:ext cx="12192000" cy="6858000"/>
+          </a:xfrm>
+          <a:prstGeom prst="rect">
+            <a:avLst/>
+          </a:prstGeom>
+          <a:ln>
+            <a:noFill/>
+          </a:ln>
+        </p:spPr>
+        <p:style>
+          <a:lnRef idx="2">
+            <a:schemeClr val="accent1">
+              <a:shade val="50000"/>
+            </a:schemeClr>
+          </a:lnRef>
+          <a:fillRef idx="1003">
+            <a:schemeClr val="dk2"/>
+          </a:fillRef>
+          <a:effectRef idx="0">
+            <a:schemeClr val="accent1"/>
+          </a:effectRef>
+          <a:fontRef idx="minor">
+            <a:schemeClr val="lt1"/>
+          </a:fontRef>
+        </p:style>
+        <p:txBody>
+          <a:bodyPr rtlCol="0" anchor="ctr"/>
+          <a:lstStyle/>
+          <a:p>
+            <a:pPr algn="ctr"/>
+            <a:endParaRPr lang="en-US"/>
+          </a:p>
+        </p:txBody>
+      </p:sp>
+      <p:sp>
+        <p:nvSpPr>
+          <p:cNvPr id="10" name="Freeform 36">
+            <a:extLst>
+              <a:ext uri="{FF2B5EF4-FFF2-40B4-BE49-F238E27FC236}">
+                <a16:creationId xmlns:a16="http://schemas.microsoft.com/office/drawing/2014/main" id="{BB237A14-61B1-4C00-A670-5D8D68A8668E}"/>
+              </a:ext>
+              <a:ext uri="{C183D7F6-B498-43B3-948B-1728B52AA6E4}">
+                <adec:decorative xmlns:adec="http://schemas.microsoft.com/office/drawing/2017/decorative" val="1"/>
+              </a:ext>
+            </a:extLst>
+          </p:cNvPr>
+          <p:cNvSpPr>
+            <a:spLocks noGrp="1" noRot="1" noChangeAspect="1" noMove="1" noResize="1" noEditPoints="1" noAdjustHandles="1" noChangeArrowheads="1" noChangeShapeType="1" noTextEdit="1"/>
+          </p:cNvSpPr>
+          <p:nvPr>
+            <p:extLst>
+              <p:ext uri="{386F3935-93C4-4BCD-93E2-E3B085C9AB24}">
+                <p16:designElem xmlns:p16="http://schemas.microsoft.com/office/powerpoint/2015/main" val="1"/>
+              </p:ext>
+            </p:extLst>
+          </p:nvPr>
+        </p:nvSpPr>
+        <p:spPr>
+          <a:xfrm flipH="1">
+            <a:off x="4644637" y="0"/>
+            <a:ext cx="559472" cy="3709642"/>
+          </a:xfrm>
+          <a:custGeom>
+            <a:avLst/>
+            <a:gdLst>
+              <a:gd name="connsiteX0" fmla="*/ 0 w 559472"/>
+              <a:gd name="connsiteY0" fmla="*/ 0 h 3709642"/>
+              <a:gd name="connsiteX1" fmla="*/ 473952 w 559472"/>
+              <a:gd name="connsiteY1" fmla="*/ 0 h 3709642"/>
+              <a:gd name="connsiteX2" fmla="*/ 485840 w 559472"/>
+              <a:gd name="connsiteY2" fmla="*/ 161194 h 3709642"/>
+              <a:gd name="connsiteX3" fmla="*/ 523949 w 559472"/>
+              <a:gd name="connsiteY3" fmla="*/ 3672197 h 3709642"/>
+              <a:gd name="connsiteX4" fmla="*/ 454748 w 559472"/>
+              <a:gd name="connsiteY4" fmla="*/ 3709642 h 3709642"/>
+              <a:gd name="connsiteX5" fmla="*/ 448224 w 559472"/>
+              <a:gd name="connsiteY5" fmla="*/ 3510471 h 3709642"/>
+              <a:gd name="connsiteX6" fmla="*/ 443564 w 559472"/>
+              <a:gd name="connsiteY6" fmla="*/ 3408563 h 3709642"/>
+              <a:gd name="connsiteX7" fmla="*/ 438902 w 559472"/>
+              <a:gd name="connsiteY7" fmla="*/ 3304407 h 3709642"/>
+              <a:gd name="connsiteX8" fmla="*/ 433941 w 559472"/>
+              <a:gd name="connsiteY8" fmla="*/ 3198777 h 3709642"/>
+              <a:gd name="connsiteX9" fmla="*/ 427584 w 559472"/>
+              <a:gd name="connsiteY9" fmla="*/ 3092510 h 3709642"/>
+              <a:gd name="connsiteX10" fmla="*/ 420988 w 559472"/>
+              <a:gd name="connsiteY10" fmla="*/ 2984390 h 3709642"/>
+              <a:gd name="connsiteX11" fmla="*/ 414330 w 559472"/>
+              <a:gd name="connsiteY11" fmla="*/ 2874401 h 3709642"/>
+              <a:gd name="connsiteX12" fmla="*/ 406840 w 559472"/>
+              <a:gd name="connsiteY12" fmla="*/ 2762980 h 3709642"/>
+              <a:gd name="connsiteX13" fmla="*/ 397745 w 559472"/>
+              <a:gd name="connsiteY13" fmla="*/ 2650566 h 3709642"/>
+              <a:gd name="connsiteX14" fmla="*/ 389154 w 559472"/>
+              <a:gd name="connsiteY14" fmla="*/ 2536612 h 3709642"/>
+              <a:gd name="connsiteX15" fmla="*/ 379225 w 559472"/>
+              <a:gd name="connsiteY15" fmla="*/ 2421642 h 3709642"/>
+              <a:gd name="connsiteX16" fmla="*/ 368316 w 559472"/>
+              <a:gd name="connsiteY16" fmla="*/ 2305627 h 3709642"/>
+              <a:gd name="connsiteX17" fmla="*/ 357466 w 559472"/>
+              <a:gd name="connsiteY17" fmla="*/ 2189233 h 3709642"/>
+              <a:gd name="connsiteX18" fmla="*/ 344982 w 559472"/>
+              <a:gd name="connsiteY18" fmla="*/ 2071473 h 3709642"/>
+              <a:gd name="connsiteX19" fmla="*/ 332466 w 559472"/>
+              <a:gd name="connsiteY19" fmla="*/ 1952216 h 3709642"/>
+              <a:gd name="connsiteX20" fmla="*/ 319121 w 559472"/>
+              <a:gd name="connsiteY20" fmla="*/ 1833776 h 3709642"/>
+              <a:gd name="connsiteX21" fmla="*/ 304408 w 559472"/>
+              <a:gd name="connsiteY21" fmla="*/ 1713948 h 3709642"/>
+              <a:gd name="connsiteX22" fmla="*/ 288685 w 559472"/>
+              <a:gd name="connsiteY22" fmla="*/ 1592703 h 3709642"/>
+              <a:gd name="connsiteX23" fmla="*/ 273050 w 559472"/>
+              <a:gd name="connsiteY23" fmla="*/ 1471451 h 3709642"/>
+              <a:gd name="connsiteX24" fmla="*/ 255813 w 559472"/>
+              <a:gd name="connsiteY24" fmla="*/ 1350328 h 3709642"/>
+              <a:gd name="connsiteX25" fmla="*/ 237060 w 559472"/>
+              <a:gd name="connsiteY25" fmla="*/ 1227080 h 3709642"/>
+              <a:gd name="connsiteX26" fmla="*/ 218488 w 559472"/>
+              <a:gd name="connsiteY26" fmla="*/ 1106065 h 3709642"/>
+              <a:gd name="connsiteX27" fmla="*/ 198221 w 559472"/>
+              <a:gd name="connsiteY27" fmla="*/ 982940 h 3709642"/>
+              <a:gd name="connsiteX28" fmla="*/ 177152 w 559472"/>
+              <a:gd name="connsiteY28" fmla="*/ 858755 h 3709642"/>
+              <a:gd name="connsiteX29" fmla="*/ 155551 w 559472"/>
+              <a:gd name="connsiteY29" fmla="*/ 736861 h 3709642"/>
+              <a:gd name="connsiteX30" fmla="*/ 131782 w 559472"/>
+              <a:gd name="connsiteY30" fmla="*/ 613645 h 3709642"/>
+              <a:gd name="connsiteX31" fmla="*/ 107123 w 559472"/>
+              <a:gd name="connsiteY31" fmla="*/ 490500 h 3709642"/>
+              <a:gd name="connsiteX32" fmla="*/ 82552 w 559472"/>
+              <a:gd name="connsiteY32" fmla="*/ 367348 h 3709642"/>
+              <a:gd name="connsiteX33" fmla="*/ 55608 w 559472"/>
+              <a:gd name="connsiteY33" fmla="*/ 244762 h 3709642"/>
+              <a:gd name="connsiteX34" fmla="*/ 28130 w 559472"/>
+              <a:gd name="connsiteY34" fmla="*/ 122220 h 3709642"/>
+              <a:gd name="connsiteX35" fmla="*/ 0 w 559472"/>
+              <a:gd name="connsiteY35" fmla="*/ 0 h 3709642"/>
+            </a:gdLst>
+            <a:ahLst/>
+            <a:cxnLst>
+              <a:cxn ang="0">
+                <a:pos x="connsiteX0" y="connsiteY0"/>
+              </a:cxn>
+              <a:cxn ang="0">
+                <a:pos x="connsiteX1" y="connsiteY1"/>
+              </a:cxn>
+              <a:cxn ang="0">
+                <a:pos x="connsiteX2" y="connsiteY2"/>
+              </a:cxn>
+              <a:cxn ang="0">
+                <a:pos x="connsiteX3" y="connsiteY3"/>
+              </a:cxn>
+              <a:cxn ang="0">
+                <a:pos x="connsiteX4" y="connsiteY4"/>
+              </a:cxn>
+              <a:cxn ang="0">
+                <a:pos x="connsiteX5" y="connsiteY5"/>
+              </a:cxn>
+              <a:cxn ang="0">
+                <a:pos x="connsiteX6" y="connsiteY6"/>
+              </a:cxn>
+              <a:cxn ang="0">
+                <a:pos x="connsiteX7" y="connsiteY7"/>
+              </a:cxn>
+              <a:cxn ang="0">
+                <a:pos x="connsiteX8" y="connsiteY8"/>
+              </a:cxn>
+              <a:cxn ang="0">
+                <a:pos x="connsiteX9" y="connsiteY9"/>
+              </a:cxn>
+              <a:cxn ang="0">
+                <a:pos x="connsiteX10" y="connsiteY10"/>
+              </a:cxn>
+              <a:cxn ang="0">
+                <a:pos x="connsiteX11" y="connsiteY11"/>
+              </a:cxn>
+              <a:cxn ang="0">
+                <a:pos x="connsiteX12" y="connsiteY12"/>
+              </a:cxn>
+              <a:cxn ang="0">
+                <a:pos x="connsiteX13" y="connsiteY13"/>
+              </a:cxn>
+              <a:cxn ang="0">
+                <a:pos x="connsiteX14" y="connsiteY14"/>
+              </a:cxn>
+              <a:cxn ang="0">
+                <a:pos x="connsiteX15" y="connsiteY15"/>
+              </a:cxn>
+              <a:cxn ang="0">
+                <a:pos x="connsiteX16" y="connsiteY16"/>
+              </a:cxn>
+              <a:cxn ang="0">
+                <a:pos x="connsiteX17" y="connsiteY17"/>
+              </a:cxn>
+              <a:cxn ang="0">
+                <a:pos x="connsiteX18" y="connsiteY18"/>
+              </a:cxn>
+              <a:cxn ang="0">
+                <a:pos x="connsiteX19" y="connsiteY19"/>
+              </a:cxn>
+              <a:cxn ang="0">
+                <a:pos x="connsiteX20" y="connsiteY20"/>
+              </a:cxn>
+              <a:cxn ang="0">
+                <a:pos x="connsiteX21" y="connsiteY21"/>
+              </a:cxn>
+              <a:cxn ang="0">
+                <a:pos x="connsiteX22" y="connsiteY22"/>
+              </a:cxn>
+              <a:cxn ang="0">
+                <a:pos x="connsiteX23" y="connsiteY23"/>
+              </a:cxn>
+              <a:cxn ang="0">
+                <a:pos x="connsiteX24" y="connsiteY24"/>
+              </a:cxn>
+              <a:cxn ang="0">
+                <a:pos x="connsiteX25" y="connsiteY25"/>
+              </a:cxn>
+              <a:cxn ang="0">
+                <a:pos x="connsiteX26" y="connsiteY26"/>
+              </a:cxn>
+              <a:cxn ang="0">
+                <a:pos x="connsiteX27" y="connsiteY27"/>
+              </a:cxn>
+              <a:cxn ang="0">
+                <a:pos x="connsiteX28" y="connsiteY28"/>
+              </a:cxn>
+              <a:cxn ang="0">
+                <a:pos x="connsiteX29" y="connsiteY29"/>
+              </a:cxn>
+              <a:cxn ang="0">
+                <a:pos x="connsiteX30" y="connsiteY30"/>
+              </a:cxn>
+              <a:cxn ang="0">
+                <a:pos x="connsiteX31" y="connsiteY31"/>
+              </a:cxn>
+              <a:cxn ang="0">
+                <a:pos x="connsiteX32" y="connsiteY32"/>
+              </a:cxn>
+              <a:cxn ang="0">
+                <a:pos x="connsiteX33" y="connsiteY33"/>
+              </a:cxn>
+              <a:cxn ang="0">
+                <a:pos x="connsiteX34" y="connsiteY34"/>
+              </a:cxn>
+              <a:cxn ang="0">
+                <a:pos x="connsiteX35" y="connsiteY35"/>
+              </a:cxn>
+            </a:cxnLst>
+            <a:rect l="l" t="t" r="r" b="b"/>
+            <a:pathLst>
+              <a:path w="559472" h="3709642">
+                <a:moveTo>
+                  <a:pt x="0" y="0"/>
+                </a:moveTo>
+                <a:lnTo>
+                  <a:pt x="473952" y="0"/>
+                </a:lnTo>
+                <a:lnTo>
+                  <a:pt x="485840" y="161194"/>
+                </a:lnTo>
+                <a:cubicBezTo>
+                  <a:pt x="552063" y="1147770"/>
+                  <a:pt x="592441" y="3086737"/>
+                  <a:pt x="523949" y="3672197"/>
+                </a:cubicBezTo>
+                <a:cubicBezTo>
+                  <a:pt x="500842" y="3684557"/>
+                  <a:pt x="477855" y="3697282"/>
+                  <a:pt x="454748" y="3709642"/>
+                </a:cubicBezTo>
+                <a:lnTo>
+                  <a:pt x="448224" y="3510471"/>
+                </a:lnTo>
+                <a:lnTo>
+                  <a:pt x="443564" y="3408563"/>
+                </a:lnTo>
+                <a:lnTo>
+                  <a:pt x="438902" y="3304407"/>
+                </a:lnTo>
+                <a:lnTo>
+                  <a:pt x="433941" y="3198777"/>
+                </a:lnTo>
+                <a:lnTo>
+                  <a:pt x="427584" y="3092510"/>
+                </a:lnTo>
+                <a:lnTo>
+                  <a:pt x="420988" y="2984390"/>
+                </a:lnTo>
+                <a:lnTo>
+                  <a:pt x="414330" y="2874401"/>
+                </a:lnTo>
+                <a:lnTo>
+                  <a:pt x="406840" y="2762980"/>
+                </a:lnTo>
+                <a:lnTo>
+                  <a:pt x="397745" y="2650566"/>
+                </a:lnTo>
+                <a:lnTo>
+                  <a:pt x="389154" y="2536612"/>
+                </a:lnTo>
+                <a:lnTo>
+                  <a:pt x="379225" y="2421642"/>
+                </a:lnTo>
+                <a:lnTo>
+                  <a:pt x="368316" y="2305627"/>
+                </a:lnTo>
+                <a:lnTo>
+                  <a:pt x="357466" y="2189233"/>
+                </a:lnTo>
+                <a:lnTo>
+                  <a:pt x="344982" y="2071473"/>
+                </a:lnTo>
+                <a:lnTo>
+                  <a:pt x="332466" y="1952216"/>
+                </a:lnTo>
+                <a:lnTo>
+                  <a:pt x="319121" y="1833776"/>
+                </a:lnTo>
+                <a:lnTo>
+                  <a:pt x="304408" y="1713948"/>
+                </a:lnTo>
+                <a:lnTo>
+                  <a:pt x="288685" y="1592703"/>
+                </a:lnTo>
+                <a:lnTo>
+                  <a:pt x="273050" y="1471451"/>
+                </a:lnTo>
+                <a:lnTo>
+                  <a:pt x="255813" y="1350328"/>
+                </a:lnTo>
+                <a:lnTo>
+                  <a:pt x="237060" y="1227080"/>
+                </a:lnTo>
+                <a:lnTo>
+                  <a:pt x="218488" y="1106065"/>
+                </a:lnTo>
+                <a:lnTo>
+                  <a:pt x="198221" y="982940"/>
+                </a:lnTo>
+                <a:lnTo>
+                  <a:pt x="177152" y="858755"/>
+                </a:lnTo>
+                <a:lnTo>
+                  <a:pt x="155551" y="736861"/>
+                </a:lnTo>
+                <a:lnTo>
+                  <a:pt x="131782" y="613645"/>
+                </a:lnTo>
+                <a:lnTo>
+                  <a:pt x="107123" y="490500"/>
+                </a:lnTo>
+                <a:lnTo>
+                  <a:pt x="82552" y="367348"/>
+                </a:lnTo>
+                <a:lnTo>
+                  <a:pt x="55608" y="244762"/>
+                </a:lnTo>
+                <a:lnTo>
+                  <a:pt x="28130" y="122220"/>
+                </a:lnTo>
+                <a:lnTo>
+                  <a:pt x="0" y="0"/>
+                </a:lnTo>
+                <a:close/>
+              </a:path>
+            </a:pathLst>
+          </a:custGeom>
+          <a:solidFill>
+            <a:schemeClr val="tx2">
+              <a:alpha val="20000"/>
+            </a:schemeClr>
+          </a:solidFill>
+          <a:ln>
+            <a:noFill/>
+          </a:ln>
+        </p:spPr>
+        <p:txBody>
+          <a:bodyPr rtlCol="0" anchor="ctr"/>
+          <a:lstStyle/>
+          <a:p>
+            <a:pPr algn="ctr"/>
+            <a:endParaRPr lang="en-US"/>
+          </a:p>
+        </p:txBody>
+      </p:sp>
+      <p:sp>
+        <p:nvSpPr>
+          <p:cNvPr id="12" name="Freeform: Shape 11">
+            <a:extLst>
+              <a:ext uri="{FF2B5EF4-FFF2-40B4-BE49-F238E27FC236}">
+                <a16:creationId xmlns:a16="http://schemas.microsoft.com/office/drawing/2014/main" id="{8598F259-6F54-47A3-8D13-1603D786A328}"/>
+              </a:ext>
+              <a:ext uri="{C183D7F6-B498-43B3-948B-1728B52AA6E4}">
+                <adec:decorative xmlns:adec="http://schemas.microsoft.com/office/drawing/2017/decorative" val="1"/>
+              </a:ext>
+            </a:extLst>
+          </p:cNvPr>
+          <p:cNvSpPr>
+            <a:spLocks noGrp="1" noRot="1" noChangeAspect="1" noMove="1" noResize="1" noEditPoints="1" noAdjustHandles="1" noChangeArrowheads="1" noChangeShapeType="1" noTextEdit="1"/>
+          </p:cNvSpPr>
+          <p:nvPr>
+            <p:extLst>
+              <p:ext uri="{386F3935-93C4-4BCD-93E2-E3B085C9AB24}">
+                <p16:designElem xmlns:p16="http://schemas.microsoft.com/office/powerpoint/2015/main" val="1"/>
+              </p:ext>
+            </p:extLst>
+          </p:nvPr>
+        </p:nvSpPr>
+        <p:spPr>
+          <a:xfrm>
+            <a:off x="1" y="1"/>
+            <a:ext cx="4990911" cy="6858001"/>
+          </a:xfrm>
+          <a:custGeom>
+            <a:avLst/>
+            <a:gdLst>
+              <a:gd name="connsiteX0" fmla="*/ 3646196 w 4990911"/>
+              <a:gd name="connsiteY0" fmla="*/ 0 h 6858001"/>
+              <a:gd name="connsiteX1" fmla="*/ 4989734 w 4990911"/>
+              <a:gd name="connsiteY1" fmla="*/ 0 h 6858001"/>
+              <a:gd name="connsiteX2" fmla="*/ 4964689 w 4990911"/>
+              <a:gd name="connsiteY2" fmla="*/ 155677 h 6858001"/>
+              <a:gd name="connsiteX3" fmla="*/ 4940820 w 4990911"/>
+              <a:gd name="connsiteY3" fmla="*/ 310668 h 6858001"/>
+              <a:gd name="connsiteX4" fmla="*/ 4917456 w 4990911"/>
+              <a:gd name="connsiteY4" fmla="*/ 466344 h 6858001"/>
+              <a:gd name="connsiteX5" fmla="*/ 4897453 w 4990911"/>
+              <a:gd name="connsiteY5" fmla="*/ 622707 h 6858001"/>
+              <a:gd name="connsiteX6" fmla="*/ 4877282 w 4990911"/>
+              <a:gd name="connsiteY6" fmla="*/ 778383 h 6858001"/>
+              <a:gd name="connsiteX7" fmla="*/ 4858456 w 4990911"/>
+              <a:gd name="connsiteY7" fmla="*/ 934746 h 6858001"/>
+              <a:gd name="connsiteX8" fmla="*/ 4842320 w 4990911"/>
+              <a:gd name="connsiteY8" fmla="*/ 1089051 h 6858001"/>
+              <a:gd name="connsiteX9" fmla="*/ 4827024 w 4990911"/>
+              <a:gd name="connsiteY9" fmla="*/ 1245413 h 6858001"/>
+              <a:gd name="connsiteX10" fmla="*/ 4813072 w 4990911"/>
+              <a:gd name="connsiteY10" fmla="*/ 1401090 h 6858001"/>
+              <a:gd name="connsiteX11" fmla="*/ 4800970 w 4990911"/>
+              <a:gd name="connsiteY11" fmla="*/ 1554023 h 6858001"/>
+              <a:gd name="connsiteX12" fmla="*/ 4788867 w 4990911"/>
+              <a:gd name="connsiteY12" fmla="*/ 1709014 h 6858001"/>
+              <a:gd name="connsiteX13" fmla="*/ 4778782 w 4990911"/>
+              <a:gd name="connsiteY13" fmla="*/ 1861947 h 6858001"/>
+              <a:gd name="connsiteX14" fmla="*/ 4770882 w 4990911"/>
+              <a:gd name="connsiteY14" fmla="*/ 2014881 h 6858001"/>
+              <a:gd name="connsiteX15" fmla="*/ 4762645 w 4990911"/>
+              <a:gd name="connsiteY15" fmla="*/ 2167128 h 6858001"/>
+              <a:gd name="connsiteX16" fmla="*/ 4755754 w 4990911"/>
+              <a:gd name="connsiteY16" fmla="*/ 2318004 h 6858001"/>
+              <a:gd name="connsiteX17" fmla="*/ 4750879 w 4990911"/>
+              <a:gd name="connsiteY17" fmla="*/ 2467509 h 6858001"/>
+              <a:gd name="connsiteX18" fmla="*/ 4746677 w 4990911"/>
+              <a:gd name="connsiteY18" fmla="*/ 2617013 h 6858001"/>
+              <a:gd name="connsiteX19" fmla="*/ 4742643 w 4990911"/>
+              <a:gd name="connsiteY19" fmla="*/ 2765146 h 6858001"/>
+              <a:gd name="connsiteX20" fmla="*/ 4740794 w 4990911"/>
+              <a:gd name="connsiteY20" fmla="*/ 2911221 h 6858001"/>
+              <a:gd name="connsiteX21" fmla="*/ 4738777 w 4990911"/>
+              <a:gd name="connsiteY21" fmla="*/ 3057297 h 6858001"/>
+              <a:gd name="connsiteX22" fmla="*/ 4737768 w 4990911"/>
+              <a:gd name="connsiteY22" fmla="*/ 3201315 h 6858001"/>
+              <a:gd name="connsiteX23" fmla="*/ 4738777 w 4990911"/>
+              <a:gd name="connsiteY23" fmla="*/ 3343961 h 6858001"/>
+              <a:gd name="connsiteX24" fmla="*/ 4738777 w 4990911"/>
+              <a:gd name="connsiteY24" fmla="*/ 3485236 h 6858001"/>
+              <a:gd name="connsiteX25" fmla="*/ 4740794 w 4990911"/>
+              <a:gd name="connsiteY25" fmla="*/ 3625139 h 6858001"/>
+              <a:gd name="connsiteX26" fmla="*/ 4743819 w 4990911"/>
+              <a:gd name="connsiteY26" fmla="*/ 3762299 h 6858001"/>
+              <a:gd name="connsiteX27" fmla="*/ 4746677 w 4990911"/>
+              <a:gd name="connsiteY27" fmla="*/ 3898087 h 6858001"/>
+              <a:gd name="connsiteX28" fmla="*/ 4749871 w 4990911"/>
+              <a:gd name="connsiteY28" fmla="*/ 4031133 h 6858001"/>
+              <a:gd name="connsiteX29" fmla="*/ 4754745 w 4990911"/>
+              <a:gd name="connsiteY29" fmla="*/ 4163492 h 6858001"/>
+              <a:gd name="connsiteX30" fmla="*/ 4759956 w 4990911"/>
+              <a:gd name="connsiteY30" fmla="*/ 4293793 h 6858001"/>
+              <a:gd name="connsiteX31" fmla="*/ 4764662 w 4990911"/>
+              <a:gd name="connsiteY31" fmla="*/ 4421352 h 6858001"/>
+              <a:gd name="connsiteX32" fmla="*/ 4777942 w 4990911"/>
+              <a:gd name="connsiteY32" fmla="*/ 4670298 h 6858001"/>
+              <a:gd name="connsiteX33" fmla="*/ 4792061 w 4990911"/>
+              <a:gd name="connsiteY33" fmla="*/ 4908956 h 6858001"/>
+              <a:gd name="connsiteX34" fmla="*/ 4806853 w 4990911"/>
+              <a:gd name="connsiteY34" fmla="*/ 5138013 h 6858001"/>
+              <a:gd name="connsiteX35" fmla="*/ 4823158 w 4990911"/>
+              <a:gd name="connsiteY35" fmla="*/ 5354726 h 6858001"/>
+              <a:gd name="connsiteX36" fmla="*/ 4840135 w 4990911"/>
+              <a:gd name="connsiteY36" fmla="*/ 5561838 h 6858001"/>
+              <a:gd name="connsiteX37" fmla="*/ 4858456 w 4990911"/>
+              <a:gd name="connsiteY37" fmla="*/ 5753862 h 6858001"/>
+              <a:gd name="connsiteX38" fmla="*/ 4876442 w 4990911"/>
+              <a:gd name="connsiteY38" fmla="*/ 5934227 h 6858001"/>
+              <a:gd name="connsiteX39" fmla="*/ 4894427 w 4990911"/>
+              <a:gd name="connsiteY39" fmla="*/ 6100191 h 6858001"/>
+              <a:gd name="connsiteX40" fmla="*/ 4911404 w 4990911"/>
+              <a:gd name="connsiteY40" fmla="*/ 6252438 h 6858001"/>
+              <a:gd name="connsiteX41" fmla="*/ 4927541 w 4990911"/>
+              <a:gd name="connsiteY41" fmla="*/ 6387541 h 6858001"/>
+              <a:gd name="connsiteX42" fmla="*/ 4942837 w 4990911"/>
+              <a:gd name="connsiteY42" fmla="*/ 6509613 h 6858001"/>
+              <a:gd name="connsiteX43" fmla="*/ 4955612 w 4990911"/>
+              <a:gd name="connsiteY43" fmla="*/ 6612483 h 6858001"/>
+              <a:gd name="connsiteX44" fmla="*/ 4967714 w 4990911"/>
+              <a:gd name="connsiteY44" fmla="*/ 6698894 h 6858001"/>
+              <a:gd name="connsiteX45" fmla="*/ 4985028 w 4990911"/>
+              <a:gd name="connsiteY45" fmla="*/ 6817538 h 6858001"/>
+              <a:gd name="connsiteX46" fmla="*/ 4990911 w 4990911"/>
+              <a:gd name="connsiteY46" fmla="*/ 6858000 h 6858001"/>
+              <a:gd name="connsiteX47" fmla="*/ 4085557 w 4990911"/>
+              <a:gd name="connsiteY47" fmla="*/ 6858000 h 6858001"/>
+              <a:gd name="connsiteX48" fmla="*/ 4085557 w 4990911"/>
+              <a:gd name="connsiteY48" fmla="*/ 6858001 h 6858001"/>
+              <a:gd name="connsiteX49" fmla="*/ 0 w 4990911"/>
+              <a:gd name="connsiteY49" fmla="*/ 6858001 h 6858001"/>
+              <a:gd name="connsiteX50" fmla="*/ 0 w 4990911"/>
+              <a:gd name="connsiteY50" fmla="*/ 1 h 6858001"/>
+              <a:gd name="connsiteX51" fmla="*/ 3646196 w 4990911"/>
+              <a:gd name="connsiteY51" fmla="*/ 1 h 6858001"/>
+            </a:gdLst>
+            <a:ahLst/>
+            <a:cxnLst>
+              <a:cxn ang="0">
+                <a:pos x="connsiteX0" y="connsiteY0"/>
+              </a:cxn>
+              <a:cxn ang="0">
+                <a:pos x="connsiteX1" y="connsiteY1"/>
+              </a:cxn>
+              <a:cxn ang="0">
+                <a:pos x="connsiteX2" y="connsiteY2"/>
+              </a:cxn>
+              <a:cxn ang="0">
+                <a:pos x="connsiteX3" y="connsiteY3"/>
+              </a:cxn>
+              <a:cxn ang="0">
+                <a:pos x="connsiteX4" y="connsiteY4"/>
+              </a:cxn>
+              <a:cxn ang="0">
+                <a:pos x="connsiteX5" y="connsiteY5"/>
+              </a:cxn>
+              <a:cxn ang="0">
+                <a:pos x="connsiteX6" y="connsiteY6"/>
+              </a:cxn>
+              <a:cxn ang="0">
+                <a:pos x="connsiteX7" y="connsiteY7"/>
+              </a:cxn>
+              <a:cxn ang="0">
+                <a:pos x="connsiteX8" y="connsiteY8"/>
+              </a:cxn>
+              <a:cxn ang="0">
+                <a:pos x="connsiteX9" y="connsiteY9"/>
+              </a:cxn>
+              <a:cxn ang="0">
+                <a:pos x="connsiteX10" y="connsiteY10"/>
+              </a:cxn>
+              <a:cxn ang="0">
+                <a:pos x="connsiteX11" y="connsiteY11"/>
+              </a:cxn>
+              <a:cxn ang="0">
+                <a:pos x="connsiteX12" y="connsiteY12"/>
+              </a:cxn>
+              <a:cxn ang="0">
+                <a:pos x="connsiteX13" y="connsiteY13"/>
+              </a:cxn>
+              <a:cxn ang="0">
+                <a:pos x="connsiteX14" y="connsiteY14"/>
+              </a:cxn>
+              <a:cxn ang="0">
+                <a:pos x="connsiteX15" y="connsiteY15"/>
+              </a:cxn>
+              <a:cxn ang="0">
+                <a:pos x="connsiteX16" y="connsiteY16"/>
+              </a:cxn>
+              <a:cxn ang="0">
+                <a:pos x="connsiteX17" y="connsiteY17"/>
+              </a:cxn>
+              <a:cxn ang="0">
+                <a:pos x="connsiteX18" y="connsiteY18"/>
+              </a:cxn>
+              <a:cxn ang="0">
+                <a:pos x="connsiteX19" y="connsiteY19"/>
+              </a:cxn>
+              <a:cxn ang="0">
+                <a:pos x="connsiteX20" y="connsiteY20"/>
+              </a:cxn>
+              <a:cxn ang="0">
+                <a:pos x="connsiteX21" y="connsiteY21"/>
+              </a:cxn>
+              <a:cxn ang="0">
+                <a:pos x="connsiteX22" y="connsiteY22"/>
+              </a:cxn>
+              <a:cxn ang="0">
+                <a:pos x="connsiteX23" y="connsiteY23"/>
+              </a:cxn>
+              <a:cxn ang="0">
+                <a:pos x="connsiteX24" y="connsiteY24"/>
+              </a:cxn>
+              <a:cxn ang="0">
+                <a:pos x="connsiteX25" y="connsiteY25"/>
+              </a:cxn>
+              <a:cxn ang="0">
+                <a:pos x="connsiteX26" y="connsiteY26"/>
+              </a:cxn>
+              <a:cxn ang="0">
+                <a:pos x="connsiteX27" y="connsiteY27"/>
+              </a:cxn>
+              <a:cxn ang="0">
+                <a:pos x="connsiteX28" y="connsiteY28"/>
+              </a:cxn>
+              <a:cxn ang="0">
+                <a:pos x="connsiteX29" y="connsiteY29"/>
+              </a:cxn>
+              <a:cxn ang="0">
+                <a:pos x="connsiteX30" y="connsiteY30"/>
+              </a:cxn>
+              <a:cxn ang="0">
+                <a:pos x="connsiteX31" y="connsiteY31"/>
+              </a:cxn>
+              <a:cxn ang="0">
+                <a:pos x="connsiteX32" y="connsiteY32"/>
+              </a:cxn>
+              <a:cxn ang="0">
+                <a:pos x="connsiteX33" y="connsiteY33"/>
+              </a:cxn>
+              <a:cxn ang="0">
+                <a:pos x="connsiteX34" y="connsiteY34"/>
+              </a:cxn>
+              <a:cxn ang="0">
+                <a:pos x="connsiteX35" y="connsiteY35"/>
+              </a:cxn>
+              <a:cxn ang="0">
+                <a:pos x="connsiteX36" y="connsiteY36"/>
+              </a:cxn>
+              <a:cxn ang="0">
+                <a:pos x="connsiteX37" y="connsiteY37"/>
+              </a:cxn>
+              <a:cxn ang="0">
+                <a:pos x="connsiteX38" y="connsiteY38"/>
+              </a:cxn>
+              <a:cxn ang="0">
+                <a:pos x="connsiteX39" y="connsiteY39"/>
+              </a:cxn>
+              <a:cxn ang="0">
+                <a:pos x="connsiteX40" y="connsiteY40"/>
+              </a:cxn>
+              <a:cxn ang="0">
+                <a:pos x="connsiteX41" y="connsiteY41"/>
+              </a:cxn>
+              <a:cxn ang="0">
+                <a:pos x="connsiteX42" y="connsiteY42"/>
+              </a:cxn>
+              <a:cxn ang="0">
+                <a:pos x="connsiteX43" y="connsiteY43"/>
+              </a:cxn>
+              <a:cxn ang="0">
+                <a:pos x="connsiteX44" y="connsiteY44"/>
+              </a:cxn>
+              <a:cxn ang="0">
+                <a:pos x="connsiteX45" y="connsiteY45"/>
+              </a:cxn>
+              <a:cxn ang="0">
+                <a:pos x="connsiteX46" y="connsiteY46"/>
+              </a:cxn>
+              <a:cxn ang="0">
+                <a:pos x="connsiteX47" y="connsiteY47"/>
+              </a:cxn>
+              <a:cxn ang="0">
+                <a:pos x="connsiteX48" y="connsiteY48"/>
+              </a:cxn>
+              <a:cxn ang="0">
+                <a:pos x="connsiteX49" y="connsiteY49"/>
+              </a:cxn>
+              <a:cxn ang="0">
+                <a:pos x="connsiteX50" y="connsiteY50"/>
+              </a:cxn>
+              <a:cxn ang="0">
+                <a:pos x="connsiteX51" y="connsiteY51"/>
+              </a:cxn>
+            </a:cxnLst>
+            <a:rect l="l" t="t" r="r" b="b"/>
+            <a:pathLst>
+              <a:path w="4990911" h="6858001">
+                <a:moveTo>
+                  <a:pt x="3646196" y="0"/>
+                </a:moveTo>
+                <a:lnTo>
+                  <a:pt x="4989734" y="0"/>
+                </a:lnTo>
+                <a:lnTo>
+                  <a:pt x="4964689" y="155677"/>
+                </a:lnTo>
+                <a:lnTo>
+                  <a:pt x="4940820" y="310668"/>
+                </a:lnTo>
+                <a:lnTo>
+                  <a:pt x="4917456" y="466344"/>
+                </a:lnTo>
+                <a:lnTo>
+                  <a:pt x="4897453" y="622707"/>
+                </a:lnTo>
+                <a:lnTo>
+                  <a:pt x="4877282" y="778383"/>
+                </a:lnTo>
+                <a:lnTo>
+                  <a:pt x="4858456" y="934746"/>
+                </a:lnTo>
+                <a:lnTo>
+                  <a:pt x="4842320" y="1089051"/>
+                </a:lnTo>
+                <a:lnTo>
+                  <a:pt x="4827024" y="1245413"/>
+                </a:lnTo>
+                <a:lnTo>
+                  <a:pt x="4813072" y="1401090"/>
+                </a:lnTo>
+                <a:lnTo>
+                  <a:pt x="4800970" y="1554023"/>
+                </a:lnTo>
+                <a:lnTo>
+                  <a:pt x="4788867" y="1709014"/>
+                </a:lnTo>
+                <a:lnTo>
+                  <a:pt x="4778782" y="1861947"/>
+                </a:lnTo>
+                <a:lnTo>
+                  <a:pt x="4770882" y="2014881"/>
+                </a:lnTo>
+                <a:lnTo>
+                  <a:pt x="4762645" y="2167128"/>
+                </a:lnTo>
+                <a:lnTo>
+                  <a:pt x="4755754" y="2318004"/>
+                </a:lnTo>
+                <a:lnTo>
+                  <a:pt x="4750879" y="2467509"/>
+                </a:lnTo>
+                <a:lnTo>
+                  <a:pt x="4746677" y="2617013"/>
+                </a:lnTo>
+                <a:lnTo>
+                  <a:pt x="4742643" y="2765146"/>
+                </a:lnTo>
+                <a:lnTo>
+                  <a:pt x="4740794" y="2911221"/>
+                </a:lnTo>
+                <a:lnTo>
+                  <a:pt x="4738777" y="3057297"/>
+                </a:lnTo>
+                <a:lnTo>
+                  <a:pt x="4737768" y="3201315"/>
+                </a:lnTo>
+                <a:lnTo>
+                  <a:pt x="4738777" y="3343961"/>
+                </a:lnTo>
+                <a:lnTo>
+                  <a:pt x="4738777" y="3485236"/>
+                </a:lnTo>
+                <a:lnTo>
+                  <a:pt x="4740794" y="3625139"/>
+                </a:lnTo>
+                <a:lnTo>
+                  <a:pt x="4743819" y="3762299"/>
+                </a:lnTo>
+                <a:lnTo>
+                  <a:pt x="4746677" y="3898087"/>
+                </a:lnTo>
+                <a:lnTo>
+                  <a:pt x="4749871" y="4031133"/>
+                </a:lnTo>
+                <a:lnTo>
+                  <a:pt x="4754745" y="4163492"/>
+                </a:lnTo>
+                <a:lnTo>
+                  <a:pt x="4759956" y="4293793"/>
+                </a:lnTo>
+                <a:lnTo>
+                  <a:pt x="4764662" y="4421352"/>
+                </a:lnTo>
+                <a:lnTo>
+                  <a:pt x="4777942" y="4670298"/>
+                </a:lnTo>
+                <a:lnTo>
+                  <a:pt x="4792061" y="4908956"/>
+                </a:lnTo>
+                <a:lnTo>
+                  <a:pt x="4806853" y="5138013"/>
+                </a:lnTo>
+                <a:lnTo>
+                  <a:pt x="4823158" y="5354726"/>
+                </a:lnTo>
+                <a:lnTo>
+                  <a:pt x="4840135" y="5561838"/>
+                </a:lnTo>
+                <a:lnTo>
+                  <a:pt x="4858456" y="5753862"/>
+                </a:lnTo>
+                <a:lnTo>
+                  <a:pt x="4876442" y="5934227"/>
+                </a:lnTo>
+                <a:lnTo>
+                  <a:pt x="4894427" y="6100191"/>
+                </a:lnTo>
+                <a:lnTo>
+                  <a:pt x="4911404" y="6252438"/>
+                </a:lnTo>
+                <a:lnTo>
+                  <a:pt x="4927541" y="6387541"/>
+                </a:lnTo>
+                <a:lnTo>
+                  <a:pt x="4942837" y="6509613"/>
+                </a:lnTo>
+                <a:lnTo>
+                  <a:pt x="4955612" y="6612483"/>
+                </a:lnTo>
+                <a:lnTo>
+                  <a:pt x="4967714" y="6698894"/>
+                </a:lnTo>
+                <a:lnTo>
+                  <a:pt x="4985028" y="6817538"/>
+                </a:lnTo>
+                <a:lnTo>
+                  <a:pt x="4990911" y="6858000"/>
+                </a:lnTo>
+                <a:lnTo>
+                  <a:pt x="4085557" y="6858000"/>
+                </a:lnTo>
+                <a:lnTo>
+                  <a:pt x="4085557" y="6858001"/>
+                </a:lnTo>
+                <a:lnTo>
+                  <a:pt x="0" y="6858001"/>
+                </a:lnTo>
+                <a:lnTo>
+                  <a:pt x="0" y="1"/>
+                </a:lnTo>
+                <a:lnTo>
+                  <a:pt x="3646196" y="1"/>
+                </a:lnTo>
+                <a:close/>
+              </a:path>
+            </a:pathLst>
+          </a:custGeom>
+          <a:ln>
+            <a:noFill/>
+          </a:ln>
+        </p:spPr>
+        <p:style>
+          <a:lnRef idx="2">
+            <a:schemeClr val="accent1">
+              <a:shade val="50000"/>
+            </a:schemeClr>
+          </a:lnRef>
+          <a:fillRef idx="1003">
+            <a:schemeClr val="dk2"/>
+          </a:fillRef>
+          <a:effectRef idx="0">
+            <a:schemeClr val="accent1"/>
+          </a:effectRef>
+          <a:fontRef idx="minor">
+            <a:schemeClr val="lt1"/>
+          </a:fontRef>
+        </p:style>
+        <p:txBody>
+          <a:bodyPr rtlCol="0" anchor="ctr"/>
+          <a:lstStyle/>
+          <a:p>
+            <a:pPr algn="ctr"/>
+            <a:endParaRPr lang="en-US"/>
+          </a:p>
+        </p:txBody>
+      </p:sp>
+      <p:sp>
+        <p:nvSpPr>
+          <p:cNvPr id="14" name="Rectangle 13">
+            <a:extLst>
+              <a:ext uri="{FF2B5EF4-FFF2-40B4-BE49-F238E27FC236}">
+                <a16:creationId xmlns:a16="http://schemas.microsoft.com/office/drawing/2014/main" id="{0BA768A8-4FED-4ED8-9E46-6BE72188ECD2}"/>
+              </a:ext>
+              <a:ext uri="{C183D7F6-B498-43B3-948B-1728B52AA6E4}">
+                <adec:decorative xmlns:adec="http://schemas.microsoft.com/office/drawing/2017/decorative" val="1"/>
+              </a:ext>
+            </a:extLst>
+          </p:cNvPr>
+          <p:cNvSpPr>
+            <a:spLocks noGrp="1" noRot="1" noChangeAspect="1" noMove="1" noResize="1" noEditPoints="1" noAdjustHandles="1" noChangeArrowheads="1" noChangeShapeType="1" noTextEdit="1"/>
+          </p:cNvSpPr>
+          <p:nvPr>
+            <p:extLst>
+              <p:ext uri="{386F3935-93C4-4BCD-93E2-E3B085C9AB24}">
+                <p16:designElem xmlns:p16="http://schemas.microsoft.com/office/powerpoint/2015/main" val="1"/>
+              </p:ext>
+            </p:extLst>
+          </p:nvPr>
+        </p:nvSpPr>
+        <p:spPr>
+          <a:xfrm>
+            <a:off x="10437812" y="0"/>
+            <a:ext cx="685800" cy="1143000"/>
+          </a:xfrm>
+          <a:prstGeom prst="rect">
+            <a:avLst/>
+          </a:prstGeom>
+          <a:solidFill>
+            <a:schemeClr val="accent1"/>
+          </a:solidFill>
+          <a:ln>
+            <a:noFill/>
+          </a:ln>
+        </p:spPr>
+        <p:style>
+          <a:lnRef idx="1">
+            <a:schemeClr val="accent1"/>
+          </a:lnRef>
+          <a:fillRef idx="3">
+            <a:schemeClr val="accent1"/>
+          </a:fillRef>
+          <a:effectRef idx="2">
+            <a:schemeClr val="accent1"/>
+          </a:effectRef>
+          <a:fontRef idx="minor">
+            <a:schemeClr val="lt1"/>
+          </a:fontRef>
+        </p:style>
+        <p:txBody>
+          <a:bodyPr/>
+          <a:lstStyle/>
+          <a:p>
+            <a:endParaRPr lang="hu-HU"/>
+          </a:p>
+        </p:txBody>
+      </p:sp>
+      <p:sp>
+        <p:nvSpPr>
+          <p:cNvPr id="2" name="Cím 1">
+            <a:extLst>
+              <a:ext uri="{FF2B5EF4-FFF2-40B4-BE49-F238E27FC236}">
+                <a16:creationId xmlns:a16="http://schemas.microsoft.com/office/drawing/2014/main" id="{EDCE472C-D595-4987-1BDF-F6CFC00D81FE}"/>
+              </a:ext>
+            </a:extLst>
+          </p:cNvPr>
+          <p:cNvSpPr>
+            <a:spLocks noGrp="1"/>
+          </p:cNvSpPr>
+          <p:nvPr>
+            <p:ph type="title"/>
+          </p:nvPr>
+        </p:nvSpPr>
+        <p:spPr>
+          <a:xfrm>
+            <a:off x="560880" y="568040"/>
+            <a:ext cx="3522879" cy="932688"/>
+          </a:xfrm>
+        </p:spPr>
+        <p:txBody>
+          <a:bodyPr>
+            <a:normAutofit fontScale="90000"/>
+          </a:bodyPr>
+          <a:lstStyle/>
+          <a:p>
+            <a:pPr algn="ctr"/>
+            <a:r>
+              <a:rPr lang="hu-HU" b="1" dirty="0">
+                <a:solidFill>
+                  <a:srgbClr val="FFFFFF"/>
+                </a:solidFill>
+                <a:latin typeface="Times New Roman" panose="02020603050405020304" pitchFamily="18" charset="0"/>
+                <a:cs typeface="Times New Roman" panose="02020603050405020304" pitchFamily="18" charset="0"/>
+              </a:rPr>
+              <a:t>NAT-PAT és RIP </a:t>
+            </a:r>
+            <a:r>
+              <a:rPr lang="hu-HU" b="1" dirty="0" err="1">
+                <a:solidFill>
+                  <a:srgbClr val="FFFFFF"/>
+                </a:solidFill>
+                <a:latin typeface="Times New Roman" panose="02020603050405020304" pitchFamily="18" charset="0"/>
+                <a:cs typeface="Times New Roman" panose="02020603050405020304" pitchFamily="18" charset="0"/>
+              </a:rPr>
+              <a:t>protocol</a:t>
+            </a:r>
+            <a:endParaRPr lang="hu-HU" b="1" dirty="0">
+              <a:solidFill>
+                <a:srgbClr val="FFFFFF"/>
+              </a:solidFill>
+              <a:latin typeface="Times New Roman" panose="02020603050405020304" pitchFamily="18" charset="0"/>
+              <a:cs typeface="Times New Roman" panose="02020603050405020304" pitchFamily="18" charset="0"/>
+            </a:endParaRPr>
+          </a:p>
+        </p:txBody>
+      </p:sp>
+      <p:sp>
+        <p:nvSpPr>
+          <p:cNvPr id="16" name="Content Placeholder 7">
+            <a:extLst>
+              <a:ext uri="{FF2B5EF4-FFF2-40B4-BE49-F238E27FC236}">
+                <a16:creationId xmlns:a16="http://schemas.microsoft.com/office/drawing/2014/main" id="{DEB89432-E0B3-BB1A-EFBF-13100EE0F5AF}"/>
+              </a:ext>
+            </a:extLst>
+          </p:cNvPr>
+          <p:cNvSpPr txBox="1">
+            <a:spLocks/>
+          </p:cNvSpPr>
+          <p:nvPr/>
+        </p:nvSpPr>
+        <p:spPr>
+          <a:xfrm>
+            <a:off x="443812" y="2238636"/>
+            <a:ext cx="4166509" cy="4111316"/>
+          </a:xfrm>
+          <a:prstGeom prst="rect">
+            <a:avLst/>
+          </a:prstGeom>
+        </p:spPr>
+        <p:txBody>
+          <a:bodyPr vert="horz" lIns="91440" tIns="45720" rIns="91440" bIns="45720" rtlCol="0">
+            <a:normAutofit fontScale="92500" lnSpcReduction="10000"/>
+          </a:bodyPr>
+          <a:lstStyle>
+            <a:lvl1pPr marL="342900" indent="-342900" algn="l" defTabSz="457200" rtl="0" eaLnBrk="1" latinLnBrk="0" hangingPunct="1">
+              <a:spcBef>
+                <a:spcPts val="1000"/>
+              </a:spcBef>
+              <a:spcAft>
+                <a:spcPts val="0"/>
+              </a:spcAft>
+              <a:buClr>
+                <a:schemeClr val="bg2">
+                  <a:lumMod val="40000"/>
+                  <a:lumOff val="60000"/>
+                </a:schemeClr>
+              </a:buClr>
+              <a:buSzPct val="80000"/>
+              <a:buFont typeface="Wingdings 3" charset="2"/>
+              <a:buChar char=""/>
+              <a:defRPr sz="2000" b="0" i="0" kern="1200">
+                <a:solidFill>
+                  <a:schemeClr val="tx1"/>
+                </a:solidFill>
+                <a:latin typeface="+mj-lt"/>
+                <a:ea typeface="+mj-ea"/>
+                <a:cs typeface="+mj-cs"/>
+              </a:defRPr>
+            </a:lvl1pPr>
+            <a:lvl2pPr marL="742950" indent="-285750" algn="l" defTabSz="457200" rtl="0" eaLnBrk="1" latinLnBrk="0" hangingPunct="1">
+              <a:spcBef>
+                <a:spcPts val="1000"/>
+              </a:spcBef>
+              <a:spcAft>
+                <a:spcPts val="0"/>
+              </a:spcAft>
+              <a:buClr>
+                <a:schemeClr val="bg2">
+                  <a:lumMod val="40000"/>
+                  <a:lumOff val="60000"/>
+                </a:schemeClr>
+              </a:buClr>
+              <a:buSzPct val="80000"/>
+              <a:buFont typeface="Wingdings 3" charset="2"/>
+              <a:buChar char=""/>
+              <a:defRPr sz="1800" b="0" i="0" kern="1200">
+                <a:solidFill>
+                  <a:schemeClr val="tx1"/>
+                </a:solidFill>
+                <a:latin typeface="+mj-lt"/>
+                <a:ea typeface="+mj-ea"/>
+                <a:cs typeface="+mj-cs"/>
+              </a:defRPr>
+            </a:lvl2pPr>
+            <a:lvl3pPr marL="1143000" indent="-228600" algn="l" defTabSz="457200" rtl="0" eaLnBrk="1" latinLnBrk="0" hangingPunct="1">
+              <a:spcBef>
+                <a:spcPts val="1000"/>
+              </a:spcBef>
+              <a:spcAft>
+                <a:spcPts val="0"/>
+              </a:spcAft>
+              <a:buClr>
+                <a:schemeClr val="bg2">
+                  <a:lumMod val="40000"/>
+                  <a:lumOff val="60000"/>
+                </a:schemeClr>
+              </a:buClr>
+              <a:buSzPct val="80000"/>
+              <a:buFont typeface="Wingdings 3" charset="2"/>
+              <a:buChar char=""/>
+              <a:defRPr sz="1600" b="0" i="0" kern="1200">
+                <a:solidFill>
+                  <a:schemeClr val="tx1"/>
+                </a:solidFill>
+                <a:latin typeface="+mj-lt"/>
+                <a:ea typeface="+mj-ea"/>
+                <a:cs typeface="+mj-cs"/>
+              </a:defRPr>
+            </a:lvl3pPr>
+            <a:lvl4pPr marL="1600200" indent="-228600" algn="l" defTabSz="457200" rtl="0" eaLnBrk="1" latinLnBrk="0" hangingPunct="1">
+              <a:spcBef>
+                <a:spcPts val="1000"/>
+              </a:spcBef>
+              <a:spcAft>
+                <a:spcPts val="0"/>
+              </a:spcAft>
+              <a:buClr>
+                <a:schemeClr val="bg2">
+                  <a:lumMod val="40000"/>
+                  <a:lumOff val="60000"/>
+                </a:schemeClr>
+              </a:buClr>
+              <a:buSzPct val="80000"/>
+              <a:buFont typeface="Wingdings 3" charset="2"/>
+              <a:buChar char=""/>
+              <a:defRPr sz="1400" b="0" i="0" kern="1200">
+                <a:solidFill>
+                  <a:schemeClr val="tx1"/>
+                </a:solidFill>
+                <a:latin typeface="+mj-lt"/>
+                <a:ea typeface="+mj-ea"/>
+                <a:cs typeface="+mj-cs"/>
+              </a:defRPr>
+            </a:lvl4pPr>
+            <a:lvl5pPr marL="2057400" indent="-228600" algn="l" defTabSz="457200" rtl="0" eaLnBrk="1" latinLnBrk="0" hangingPunct="1">
+              <a:spcBef>
+                <a:spcPts val="1000"/>
+              </a:spcBef>
+              <a:spcAft>
+                <a:spcPts val="0"/>
+              </a:spcAft>
+              <a:buClr>
+                <a:schemeClr val="bg2">
+                  <a:lumMod val="40000"/>
+                  <a:lumOff val="60000"/>
+                </a:schemeClr>
+              </a:buClr>
+              <a:buSzPct val="80000"/>
+              <a:buFont typeface="Wingdings 3" charset="2"/>
+              <a:buChar char=""/>
+              <a:defRPr sz="1400" b="0" i="0" kern="1200">
+                <a:solidFill>
+                  <a:schemeClr val="tx1"/>
+                </a:solidFill>
+                <a:latin typeface="+mj-lt"/>
+                <a:ea typeface="+mj-ea"/>
+                <a:cs typeface="+mj-cs"/>
+              </a:defRPr>
+            </a:lvl5pPr>
+            <a:lvl6pPr marL="2506000" indent="-228600" algn="l" defTabSz="457200" rtl="0" eaLnBrk="1" latinLnBrk="0" hangingPunct="1">
+              <a:spcBef>
+                <a:spcPts val="1000"/>
+              </a:spcBef>
+              <a:spcAft>
+                <a:spcPts val="0"/>
+              </a:spcAft>
+              <a:buClr>
+                <a:schemeClr val="bg2">
+                  <a:lumMod val="40000"/>
+                  <a:lumOff val="60000"/>
+                </a:schemeClr>
+              </a:buClr>
+              <a:buSzPct val="80000"/>
+              <a:buFont typeface="Wingdings 3" charset="2"/>
+              <a:buChar char=""/>
+              <a:defRPr sz="1400" b="0" i="0" kern="1200">
+                <a:solidFill>
+                  <a:schemeClr val="tx1"/>
+                </a:solidFill>
+                <a:latin typeface="+mj-lt"/>
+                <a:ea typeface="+mj-ea"/>
+                <a:cs typeface="+mj-cs"/>
+              </a:defRPr>
+            </a:lvl6pPr>
+            <a:lvl7pPr marL="2971800" indent="-228600" algn="l" defTabSz="457200" rtl="0" eaLnBrk="1" latinLnBrk="0" hangingPunct="1">
+              <a:spcBef>
+                <a:spcPts val="1000"/>
+              </a:spcBef>
+              <a:spcAft>
+                <a:spcPts val="0"/>
+              </a:spcAft>
+              <a:buClr>
+                <a:schemeClr val="bg2">
+                  <a:lumMod val="40000"/>
+                  <a:lumOff val="60000"/>
+                </a:schemeClr>
+              </a:buClr>
+              <a:buSzPct val="80000"/>
+              <a:buFont typeface="Wingdings 3" charset="2"/>
+              <a:buChar char=""/>
+              <a:defRPr sz="1400" b="0" i="0" kern="1200">
+                <a:solidFill>
+                  <a:schemeClr val="tx1"/>
+                </a:solidFill>
+                <a:latin typeface="+mj-lt"/>
+                <a:ea typeface="+mj-ea"/>
+                <a:cs typeface="+mj-cs"/>
+              </a:defRPr>
+            </a:lvl7pPr>
+            <a:lvl8pPr marL="3429000" indent="-228600" algn="l" defTabSz="457200" rtl="0" eaLnBrk="1" latinLnBrk="0" hangingPunct="1">
+              <a:spcBef>
+                <a:spcPts val="1000"/>
+              </a:spcBef>
+              <a:spcAft>
+                <a:spcPts val="0"/>
+              </a:spcAft>
+              <a:buClr>
+                <a:schemeClr val="bg2">
+                  <a:lumMod val="40000"/>
+                  <a:lumOff val="60000"/>
+                </a:schemeClr>
+              </a:buClr>
+              <a:buSzPct val="80000"/>
+              <a:buFont typeface="Wingdings 3" charset="2"/>
+              <a:buChar char=""/>
+              <a:defRPr sz="1400" b="0" i="0" kern="1200">
+                <a:solidFill>
+                  <a:schemeClr val="tx1"/>
+                </a:solidFill>
+                <a:latin typeface="+mj-lt"/>
+                <a:ea typeface="+mj-ea"/>
+                <a:cs typeface="+mj-cs"/>
+              </a:defRPr>
+            </a:lvl8pPr>
+            <a:lvl9pPr marL="3886200" indent="-228600" algn="l" defTabSz="457200" rtl="0" eaLnBrk="1" latinLnBrk="0" hangingPunct="1">
+              <a:spcBef>
+                <a:spcPts val="1000"/>
+              </a:spcBef>
+              <a:spcAft>
+                <a:spcPts val="0"/>
+              </a:spcAft>
+              <a:buClr>
+                <a:schemeClr val="bg2">
+                  <a:lumMod val="40000"/>
+                  <a:lumOff val="60000"/>
+                </a:schemeClr>
+              </a:buClr>
+              <a:buSzPct val="80000"/>
+              <a:buFont typeface="Wingdings 3" charset="2"/>
+              <a:buChar char=""/>
+              <a:defRPr sz="1400" b="0" i="0" kern="1200">
+                <a:solidFill>
+                  <a:schemeClr val="tx1"/>
+                </a:solidFill>
+                <a:latin typeface="+mj-lt"/>
+                <a:ea typeface="+mj-ea"/>
+                <a:cs typeface="+mj-cs"/>
+              </a:defRPr>
+            </a:lvl9pPr>
+          </a:lstStyle>
+          <a:p>
+            <a:r>
+              <a:rPr lang="en-US" sz="2200" dirty="0">
+                <a:solidFill>
+                  <a:srgbClr val="EBEBEB"/>
+                </a:solidFill>
+                <a:latin typeface="Times New Roman" panose="02020603050405020304" pitchFamily="18" charset="0"/>
+                <a:cs typeface="Times New Roman" panose="02020603050405020304" pitchFamily="18" charset="0"/>
+              </a:rPr>
+              <a:t>NAT translates private IP addresses to public IP addresses.</a:t>
+            </a:r>
+          </a:p>
+          <a:p>
+            <a:r>
+              <a:rPr lang="en-US" sz="2200" dirty="0">
+                <a:solidFill>
+                  <a:srgbClr val="EBEBEB"/>
+                </a:solidFill>
+                <a:latin typeface="Times New Roman" panose="02020603050405020304" pitchFamily="18" charset="0"/>
+                <a:cs typeface="Times New Roman" panose="02020603050405020304" pitchFamily="18" charset="0"/>
+              </a:rPr>
+              <a:t>It runs on a router at the boundary between internal and external networks.</a:t>
+            </a:r>
+          </a:p>
+          <a:p>
+            <a:r>
+              <a:rPr lang="en-US" sz="2200" dirty="0">
+                <a:solidFill>
+                  <a:srgbClr val="EBEBEB"/>
+                </a:solidFill>
+                <a:latin typeface="Times New Roman" panose="02020603050405020304" pitchFamily="18" charset="0"/>
+                <a:cs typeface="Times New Roman" panose="02020603050405020304" pitchFamily="18" charset="0"/>
+              </a:rPr>
+              <a:t>PAT (Port Address Translation) enables multiple devices to communicate through a single IP.</a:t>
+            </a:r>
+          </a:p>
+          <a:p>
+            <a:r>
+              <a:rPr lang="en-US" sz="2200" dirty="0">
+                <a:solidFill>
+                  <a:srgbClr val="EBEBEB"/>
+                </a:solidFill>
+                <a:latin typeface="Times New Roman" panose="02020603050405020304" pitchFamily="18" charset="0"/>
+                <a:cs typeface="Times New Roman" panose="02020603050405020304" pitchFamily="18" charset="0"/>
+              </a:rPr>
+              <a:t>RIP (Routing Information Protocol) is a distance-vector routing protocol that shares network information only with neighbors.</a:t>
+            </a:r>
+            <a:endParaRPr lang="hu-HU" sz="2200" dirty="0">
+              <a:solidFill>
+                <a:srgbClr val="EBEBEB"/>
+              </a:solidFill>
+              <a:latin typeface="Times New Roman" panose="02020603050405020304" pitchFamily="18" charset="0"/>
+              <a:cs typeface="Times New Roman" panose="02020603050405020304" pitchFamily="18" charset="0"/>
+            </a:endParaRPr>
+          </a:p>
+        </p:txBody>
+      </p:sp>
+      <p:pic>
+        <p:nvPicPr>
+          <p:cNvPr id="6" name="Picture 2" descr="Understanding NAT/PAT - A Step-by-Step Guide with Ostinato">
+            <a:extLst>
+              <a:ext uri="{FF2B5EF4-FFF2-40B4-BE49-F238E27FC236}">
+                <a16:creationId xmlns:a16="http://schemas.microsoft.com/office/drawing/2014/main" id="{94ABC7AE-DE86-7AB3-7D69-609B612D650F}"/>
+              </a:ext>
+            </a:extLst>
+          </p:cNvPr>
+          <p:cNvPicPr>
+            <a:picLocks noChangeAspect="1" noChangeArrowheads="1"/>
+          </p:cNvPicPr>
+          <p:nvPr/>
+        </p:nvPicPr>
+        <p:blipFill>
+          <a:blip r:embed="rId2">
+            <a:extLst>
+              <a:ext uri="{28A0092B-C50C-407E-A947-70E740481C1C}">
+                <a14:useLocalDpi xmlns:a14="http://schemas.microsoft.com/office/drawing/2010/main" val="0"/>
+              </a:ext>
+            </a:extLst>
+          </a:blip>
+          <a:srcRect/>
+          <a:stretch>
+            <a:fillRect/>
+          </a:stretch>
+        </p:blipFill>
+        <p:spPr bwMode="auto">
+          <a:xfrm>
+            <a:off x="5272740" y="1037844"/>
+            <a:ext cx="3695047" cy="3436394"/>
+          </a:xfrm>
+          <a:prstGeom prst="rect">
+            <a:avLst/>
+          </a:prstGeom>
+          <a:noFill/>
+          <a:extLst>
+            <a:ext uri="{909E8E84-426E-40DD-AFC4-6F175D3DCCD1}">
+              <a14:hiddenFill xmlns:a14="http://schemas.microsoft.com/office/drawing/2010/main">
+                <a:solidFill>
+                  <a:srgbClr val="FFFFFF"/>
+                </a:solidFill>
+              </a14:hiddenFill>
+            </a:ext>
+          </a:extLst>
+        </p:spPr>
+      </p:pic>
+      <p:pic>
+        <p:nvPicPr>
+          <p:cNvPr id="7" name="Picture 4" descr="Routing Information Protocol (RIP) ⋆ | Basic Routing Protocol RIPv2">
+            <a:extLst>
+              <a:ext uri="{FF2B5EF4-FFF2-40B4-BE49-F238E27FC236}">
+                <a16:creationId xmlns:a16="http://schemas.microsoft.com/office/drawing/2014/main" id="{65A5071C-9BEA-7C88-79C7-12975303D071}"/>
+              </a:ext>
+            </a:extLst>
+          </p:cNvPr>
+          <p:cNvPicPr>
+            <a:picLocks noChangeAspect="1" noChangeArrowheads="1"/>
+          </p:cNvPicPr>
+          <p:nvPr/>
+        </p:nvPicPr>
+        <p:blipFill>
+          <a:blip r:embed="rId3">
+            <a:extLst>
+              <a:ext uri="{28A0092B-C50C-407E-A947-70E740481C1C}">
+                <a14:useLocalDpi xmlns:a14="http://schemas.microsoft.com/office/drawing/2010/main" val="0"/>
+              </a:ext>
+            </a:extLst>
+          </a:blip>
+          <a:srcRect/>
+          <a:stretch>
+            <a:fillRect/>
+          </a:stretch>
+        </p:blipFill>
+        <p:spPr bwMode="auto">
+          <a:xfrm>
+            <a:off x="8214500" y="3928186"/>
+            <a:ext cx="3695047" cy="2697525"/>
+          </a:xfrm>
+          <a:prstGeom prst="rect">
+            <a:avLst/>
+          </a:prstGeom>
+          <a:noFill/>
+          <a:extLst>
+            <a:ext uri="{909E8E84-426E-40DD-AFC4-6F175D3DCCD1}">
+              <a14:hiddenFill xmlns:a14="http://schemas.microsoft.com/office/drawing/2010/main">
+                <a:solidFill>
+                  <a:srgbClr val="FFFFFF"/>
+                </a:solidFill>
+              </a14:hiddenFill>
+            </a:ext>
+          </a:extLst>
+        </p:spPr>
+      </p:pic>
+    </p:spTree>
+    <p:extLst>
+      <p:ext uri="{BB962C8B-B14F-4D97-AF65-F5344CB8AC3E}">
+        <p14:creationId xmlns:p14="http://schemas.microsoft.com/office/powerpoint/2010/main" val="27287376"/>
+      </p:ext>
+    </p:extLst>
+  </p:cSld>
+  <p:clrMapOvr>
+    <a:overrideClrMapping bg1="lt1" tx1="dk1" bg2="lt2" tx2="dk2" accent1="accent1" accent2="accent2" accent3="accent3" accent4="accent4" accent5="accent5" accent6="accent6" hlink="hlink" folHlink="folHlink"/>
+  </p:clrMapOvr>
+  <mc:AlternateContent xmlns:mc="http://schemas.openxmlformats.org/markup-compatibility/2006" xmlns:p159="http://schemas.microsoft.com/office/powerpoint/2015/09/main">
+    <mc:Choice Requires="p159">
+      <p:transition xmlns:p14="http://schemas.microsoft.com/office/powerpoint/2010/main" spd="slow" p14:dur="2000">
+        <p159:morph option="byObject"/>
+      </p:transition>
+    </mc:Choice>
+    <mc:Fallback xmlns="">
+      <p:transition spd="slow">
+        <p:fade/>
+      </p:transition>
+    </mc:Fallback>
+  </mc:AlternateContent>
+</p:sld>
+</file>
+
+<file path=ppt/slides/slide11.xml><?xml version="1.0" encoding="utf-8"?>
 <p:sld xmlns:a="http://schemas.openxmlformats.org/drawingml/2006/main" xmlns:r="http://schemas.openxmlformats.org/officeDocument/2006/relationships" xmlns:p="http://schemas.openxmlformats.org/presentationml/2006/main">
   <p:cSld>
     <p:spTree>
@@ -7061,10 +8763,22 @@
   <p:clrMapOvr>
     <a:masterClrMapping/>
   </p:clrMapOvr>
+  <mc:AlternateContent xmlns:mc="http://schemas.openxmlformats.org/markup-compatibility/2006" xmlns:p159="http://schemas.microsoft.com/office/powerpoint/2015/09/main">
+    <mc:Choice Requires="p159">
+      <p:transition xmlns:p14="http://schemas.microsoft.com/office/powerpoint/2010/main" spd="slow" p14:dur="2000">
+        <p159:morph option="byObject"/>
+      </p:transition>
+    </mc:Choice>
+    <mc:Fallback xmlns="">
+      <p:transition spd="slow">
+        <p:fade/>
+      </p:transition>
+    </mc:Fallback>
+  </mc:AlternateContent>
 </p:sld>
 </file>
 
-<file path=ppt/slides/slide11.xml><?xml version="1.0" encoding="utf-8"?>
+<file path=ppt/slides/slide12.xml><?xml version="1.0" encoding="utf-8"?>
 <p:sld xmlns:a="http://schemas.openxmlformats.org/drawingml/2006/main" xmlns:r="http://schemas.openxmlformats.org/officeDocument/2006/relationships" xmlns:p="http://schemas.openxmlformats.org/presentationml/2006/main">
   <p:cSld>
     <p:spTree>
@@ -7203,10 +8917,22 @@
   <p:clrMapOvr>
     <a:masterClrMapping/>
   </p:clrMapOvr>
+  <mc:AlternateContent xmlns:mc="http://schemas.openxmlformats.org/markup-compatibility/2006" xmlns:p159="http://schemas.microsoft.com/office/powerpoint/2015/09/main">
+    <mc:Choice Requires="p159">
+      <p:transition xmlns:p14="http://schemas.microsoft.com/office/powerpoint/2010/main" spd="slow" p14:dur="2000">
+        <p159:morph option="byObject"/>
+      </p:transition>
+    </mc:Choice>
+    <mc:Fallback xmlns="">
+      <p:transition spd="slow">
+        <p:fade/>
+      </p:transition>
+    </mc:Fallback>
+  </mc:AlternateContent>
 </p:sld>
 </file>
 
-<file path=ppt/slides/slide12.xml><?xml version="1.0" encoding="utf-8"?>
+<file path=ppt/slides/slide13.xml><?xml version="1.0" encoding="utf-8"?>
 <p:sld xmlns:a="http://schemas.openxmlformats.org/drawingml/2006/main" xmlns:r="http://schemas.openxmlformats.org/officeDocument/2006/relationships" xmlns:p="http://schemas.openxmlformats.org/presentationml/2006/main">
   <p:cSld>
     <p:spTree>
@@ -7342,10 +9068,22 @@
   <p:clrMapOvr>
     <a:masterClrMapping/>
   </p:clrMapOvr>
+  <mc:AlternateContent xmlns:mc="http://schemas.openxmlformats.org/markup-compatibility/2006" xmlns:p159="http://schemas.microsoft.com/office/powerpoint/2015/09/main">
+    <mc:Choice Requires="p159">
+      <p:transition xmlns:p14="http://schemas.microsoft.com/office/powerpoint/2010/main" spd="slow" p14:dur="2000">
+        <p159:morph option="byObject"/>
+      </p:transition>
+    </mc:Choice>
+    <mc:Fallback xmlns="">
+      <p:transition spd="slow">
+        <p:fade/>
+      </p:transition>
+    </mc:Fallback>
+  </mc:AlternateContent>
 </p:sld>
 </file>
 
-<file path=ppt/slides/slide13.xml><?xml version="1.0" encoding="utf-8"?>
+<file path=ppt/slides/slide14.xml><?xml version="1.0" encoding="utf-8"?>
 <p:sld xmlns:a="http://schemas.openxmlformats.org/drawingml/2006/main" xmlns:r="http://schemas.openxmlformats.org/officeDocument/2006/relationships" xmlns:p="http://schemas.openxmlformats.org/presentationml/2006/main">
   <p:cSld>
     <p:spTree>
@@ -7411,10 +9149,10 @@
       </p:sp>
       <p:pic>
         <p:nvPicPr>
-          <p:cNvPr id="5" name="Kép 4" descr="A képen képernyőkép, kör, Grafika látható&#10;&#10;Előfordulhat, hogy a mesterséges intelligencia által létrehozott tartalom helytelen.">
+          <p:cNvPr id="3" name="Kép 2" descr="A képen képernyőkép, diagram, sor látható">
             <a:extLst>
               <a:ext uri="{FF2B5EF4-FFF2-40B4-BE49-F238E27FC236}">
-                <a16:creationId xmlns:a16="http://schemas.microsoft.com/office/drawing/2014/main" id="{B59451D4-54E7-3AE2-3F4C-DFD57139F162}"/>
+                <a16:creationId xmlns:a16="http://schemas.microsoft.com/office/drawing/2014/main" id="{66EBA0F1-6849-897B-2863-BE95749AEFB1}"/>
               </a:ext>
             </a:extLst>
           </p:cNvPr>
@@ -7437,8 +9175,8 @@
         </p:blipFill>
         <p:spPr>
           <a:xfrm>
-            <a:off x="1539605" y="2373457"/>
-            <a:ext cx="9112788" cy="2920766"/>
+            <a:off x="1842051" y="2487803"/>
+            <a:ext cx="7776375" cy="2945597"/>
           </a:xfrm>
           <a:prstGeom prst="rect">
             <a:avLst/>
@@ -7447,10 +9185,10 @@
       </p:pic>
       <p:pic>
         <p:nvPicPr>
-          <p:cNvPr id="8" name="Kép 7">
+          <p:cNvPr id="4" name="Kép 3">
             <a:extLst>
               <a:ext uri="{FF2B5EF4-FFF2-40B4-BE49-F238E27FC236}">
-                <a16:creationId xmlns:a16="http://schemas.microsoft.com/office/drawing/2014/main" id="{C30871D6-8B30-C1BD-7B9A-F58FCC584668}"/>
+                <a16:creationId xmlns:a16="http://schemas.microsoft.com/office/drawing/2014/main" id="{3E2DBA1B-CC96-BD52-5477-5B5D817D8FA3}"/>
               </a:ext>
             </a:extLst>
           </p:cNvPr>
@@ -7467,8 +9205,8 @@
         </p:blipFill>
         <p:spPr>
           <a:xfrm>
-            <a:off x="1425448" y="5837395"/>
-            <a:ext cx="9341103" cy="736994"/>
+            <a:off x="874775" y="6005038"/>
+            <a:ext cx="10442448" cy="536968"/>
           </a:xfrm>
           <a:prstGeom prst="rect">
             <a:avLst/>
@@ -7485,10 +9223,22 @@
   <p:clrMapOvr>
     <a:masterClrMapping/>
   </p:clrMapOvr>
+  <mc:AlternateContent xmlns:mc="http://schemas.openxmlformats.org/markup-compatibility/2006" xmlns:p159="http://schemas.microsoft.com/office/powerpoint/2015/09/main">
+    <mc:Choice Requires="p159">
+      <p:transition xmlns:p14="http://schemas.microsoft.com/office/powerpoint/2010/main" spd="slow" p14:dur="2000">
+        <p159:morph option="byObject"/>
+      </p:transition>
+    </mc:Choice>
+    <mc:Fallback xmlns="">
+      <p:transition spd="slow">
+        <p:fade/>
+      </p:transition>
+    </mc:Fallback>
+  </mc:AlternateContent>
 </p:sld>
 </file>
 
-<file path=ppt/slides/slide14.xml><?xml version="1.0" encoding="utf-8"?>
+<file path=ppt/slides/slide15.xml><?xml version="1.0" encoding="utf-8"?>
 <p:sld xmlns:a="http://schemas.openxmlformats.org/drawingml/2006/main" xmlns:r="http://schemas.openxmlformats.org/officeDocument/2006/relationships" xmlns:p="http://schemas.openxmlformats.org/presentationml/2006/main">
   <p:cSld>
     <p:spTree>
@@ -7572,6 +9322,18 @@
   <p:clrMapOvr>
     <a:masterClrMapping/>
   </p:clrMapOvr>
+  <mc:AlternateContent xmlns:mc="http://schemas.openxmlformats.org/markup-compatibility/2006" xmlns:p159="http://schemas.microsoft.com/office/powerpoint/2015/09/main">
+    <mc:Choice Requires="p159">
+      <p:transition xmlns:p14="http://schemas.microsoft.com/office/powerpoint/2010/main" spd="slow" p14:dur="2000">
+        <p159:morph option="byObject"/>
+      </p:transition>
+    </mc:Choice>
+    <mc:Fallback xmlns="">
+      <p:transition spd="slow">
+        <p:fade/>
+      </p:transition>
+    </mc:Fallback>
+  </mc:AlternateContent>
 </p:sld>
 </file>
 
@@ -8060,6 +9822,18 @@
   <p:clrMapOvr>
     <a:masterClrMapping/>
   </p:clrMapOvr>
+  <mc:AlternateContent xmlns:mc="http://schemas.openxmlformats.org/markup-compatibility/2006" xmlns:p159="http://schemas.microsoft.com/office/powerpoint/2015/09/main">
+    <mc:Choice Requires="p159">
+      <p:transition xmlns:p14="http://schemas.microsoft.com/office/powerpoint/2010/main" spd="slow" p14:dur="2000">
+        <p159:morph option="byObject"/>
+      </p:transition>
+    </mc:Choice>
+    <mc:Fallback xmlns="">
+      <p:transition spd="slow">
+        <p:fade/>
+      </p:transition>
+    </mc:Fallback>
+  </mc:AlternateContent>
 </p:sld>
 </file>
 
@@ -9287,6 +11061,18 @@
   <p:clrMapOvr>
     <a:overrideClrMapping bg1="lt1" tx1="dk1" bg2="lt2" tx2="dk2" accent1="accent1" accent2="accent2" accent3="accent3" accent4="accent4" accent5="accent5" accent6="accent6" hlink="hlink" folHlink="folHlink"/>
   </p:clrMapOvr>
+  <mc:AlternateContent xmlns:mc="http://schemas.openxmlformats.org/markup-compatibility/2006" xmlns:p159="http://schemas.microsoft.com/office/powerpoint/2015/09/main">
+    <mc:Choice Requires="p159">
+      <p:transition xmlns:p14="http://schemas.microsoft.com/office/powerpoint/2010/main" spd="slow" p14:dur="2000">
+        <p159:morph option="byObject"/>
+      </p:transition>
+    </mc:Choice>
+    <mc:Fallback xmlns="">
+      <p:transition spd="slow">
+        <p:fade/>
+      </p:transition>
+    </mc:Fallback>
+  </mc:AlternateContent>
 </p:sld>
 </file>
 
@@ -9578,6 +11364,18 @@
   <p:clrMapOvr>
     <a:masterClrMapping/>
   </p:clrMapOvr>
+  <mc:AlternateContent xmlns:mc="http://schemas.openxmlformats.org/markup-compatibility/2006" xmlns:p159="http://schemas.microsoft.com/office/powerpoint/2015/09/main">
+    <mc:Choice Requires="p159">
+      <p:transition xmlns:p14="http://schemas.microsoft.com/office/powerpoint/2010/main" spd="slow" p14:dur="2000">
+        <p159:morph option="byObject"/>
+      </p:transition>
+    </mc:Choice>
+    <mc:Fallback xmlns="">
+      <p:transition spd="slow">
+        <p:fade/>
+      </p:transition>
+    </mc:Fallback>
+  </mc:AlternateContent>
 </p:sld>
 </file>
 
@@ -9827,6 +11625,18 @@
   <p:clrMapOvr>
     <a:masterClrMapping/>
   </p:clrMapOvr>
+  <mc:AlternateContent xmlns:mc="http://schemas.openxmlformats.org/markup-compatibility/2006" xmlns:p159="http://schemas.microsoft.com/office/powerpoint/2015/09/main">
+    <mc:Choice Requires="p159">
+      <p:transition xmlns:p14="http://schemas.microsoft.com/office/powerpoint/2010/main" spd="slow" p14:dur="2000">
+        <p159:morph option="byObject"/>
+      </p:transition>
+    </mc:Choice>
+    <mc:Fallback xmlns="">
+      <p:transition spd="slow">
+        <p:fade/>
+      </p:transition>
+    </mc:Fallback>
+  </mc:AlternateContent>
 </p:sld>
 </file>
 
@@ -11023,6 +12833,18 @@
   <p:clrMapOvr>
     <a:overrideClrMapping bg1="lt1" tx1="dk1" bg2="lt2" tx2="dk2" accent1="accent1" accent2="accent2" accent3="accent3" accent4="accent4" accent5="accent5" accent6="accent6" hlink="hlink" folHlink="folHlink"/>
   </p:clrMapOvr>
+  <mc:AlternateContent xmlns:mc="http://schemas.openxmlformats.org/markup-compatibility/2006" xmlns:p159="http://schemas.microsoft.com/office/powerpoint/2015/09/main">
+    <mc:Choice Requires="p159">
+      <p:transition xmlns:p14="http://schemas.microsoft.com/office/powerpoint/2010/main" spd="slow" p14:dur="2000">
+        <p159:morph option="byObject"/>
+      </p:transition>
+    </mc:Choice>
+    <mc:Fallback xmlns="">
+      <p:transition spd="slow">
+        <p:fade/>
+      </p:transition>
+    </mc:Fallback>
+  </mc:AlternateContent>
 </p:sld>
 </file>
 
@@ -12266,6 +14088,18 @@
   <p:clrMapOvr>
     <a:overrideClrMapping bg1="lt1" tx1="dk1" bg2="lt2" tx2="dk2" accent1="accent1" accent2="accent2" accent3="accent3" accent4="accent4" accent5="accent5" accent6="accent6" hlink="hlink" folHlink="folHlink"/>
   </p:clrMapOvr>
+  <mc:AlternateContent xmlns:mc="http://schemas.openxmlformats.org/markup-compatibility/2006" xmlns:p159="http://schemas.microsoft.com/office/powerpoint/2015/09/main">
+    <mc:Choice Requires="p159">
+      <p:transition xmlns:p14="http://schemas.microsoft.com/office/powerpoint/2010/main" spd="slow" p14:dur="2000">
+        <p159:morph option="byObject"/>
+      </p:transition>
+    </mc:Choice>
+    <mc:Fallback xmlns="">
+      <p:transition spd="slow">
+        <p:fade/>
+      </p:transition>
+    </mc:Fallback>
+  </mc:AlternateContent>
 </p:sld>
 </file>
 
@@ -13772,6 +15606,18 @@
   <p:clrMapOvr>
     <a:overrideClrMapping bg1="lt1" tx1="dk1" bg2="lt2" tx2="dk2" accent1="accent1" accent2="accent2" accent3="accent3" accent4="accent4" accent5="accent5" accent6="accent6" hlink="hlink" folHlink="folHlink"/>
   </p:clrMapOvr>
+  <mc:AlternateContent xmlns:mc="http://schemas.openxmlformats.org/markup-compatibility/2006" xmlns:p159="http://schemas.microsoft.com/office/powerpoint/2015/09/main">
+    <mc:Choice Requires="p159">
+      <p:transition xmlns:p14="http://schemas.microsoft.com/office/powerpoint/2010/main" spd="slow" p14:dur="2000">
+        <p159:morph option="byObject"/>
+      </p:transition>
+    </mc:Choice>
+    <mc:Fallback xmlns="">
+      <p:transition spd="slow">
+        <p:fade/>
+      </p:transition>
+    </mc:Fallback>
+  </mc:AlternateContent>
 </p:sld>
 </file>
 
@@ -15163,6 +17009,18 @@
   <p:clrMapOvr>
     <a:overrideClrMapping bg1="lt1" tx1="dk1" bg2="lt2" tx2="dk2" accent1="accent1" accent2="accent2" accent3="accent3" accent4="accent4" accent5="accent5" accent6="accent6" hlink="hlink" folHlink="folHlink"/>
   </p:clrMapOvr>
+  <mc:AlternateContent xmlns:mc="http://schemas.openxmlformats.org/markup-compatibility/2006" xmlns:p159="http://schemas.microsoft.com/office/powerpoint/2015/09/main">
+    <mc:Choice Requires="p159">
+      <p:transition xmlns:p14="http://schemas.microsoft.com/office/powerpoint/2010/main" spd="slow" p14:dur="2000">
+        <p159:morph option="byObject"/>
+      </p:transition>
+    </mc:Choice>
+    <mc:Fallback xmlns="">
+      <p:transition spd="slow">
+        <p:fade/>
+      </p:transition>
+    </mc:Fallback>
+  </mc:AlternateContent>
 </p:sld>
 </file>
 
